--- a/topic06-arrays/unit-1/talk-1-intro-to-arrays/a-arrays.pptx
+++ b/topic06-arrays/unit-1/talk-1-intro-to-arrays/a-arrays.pptx
@@ -5,7 +5,7 @@
     <p:sldMasterId id="2147483660" r:id="rId1"/>
   </p:sldMasterIdLst>
   <p:notesMasterIdLst>
-    <p:notesMasterId r:id="rId45"/>
+    <p:notesMasterId r:id="rId46"/>
   </p:notesMasterIdLst>
   <p:sldIdLst>
     <p:sldId id="325" r:id="rId2"/>
@@ -32,25 +32,26 @@
     <p:sldId id="614" r:id="rId23"/>
     <p:sldId id="616" r:id="rId24"/>
     <p:sldId id="613" r:id="rId25"/>
-    <p:sldId id="575" r:id="rId26"/>
-    <p:sldId id="631" r:id="rId27"/>
-    <p:sldId id="640" r:id="rId28"/>
-    <p:sldId id="576" r:id="rId29"/>
-    <p:sldId id="618" r:id="rId30"/>
-    <p:sldId id="620" r:id="rId31"/>
-    <p:sldId id="621" r:id="rId32"/>
-    <p:sldId id="578" r:id="rId33"/>
-    <p:sldId id="641" r:id="rId34"/>
-    <p:sldId id="622" r:id="rId35"/>
-    <p:sldId id="623" r:id="rId36"/>
-    <p:sldId id="642" r:id="rId37"/>
-    <p:sldId id="624" r:id="rId38"/>
-    <p:sldId id="625" r:id="rId39"/>
-    <p:sldId id="626" r:id="rId40"/>
-    <p:sldId id="627" r:id="rId41"/>
-    <p:sldId id="581" r:id="rId42"/>
-    <p:sldId id="630" r:id="rId43"/>
-    <p:sldId id="347" r:id="rId44"/>
+    <p:sldId id="643" r:id="rId26"/>
+    <p:sldId id="575" r:id="rId27"/>
+    <p:sldId id="631" r:id="rId28"/>
+    <p:sldId id="640" r:id="rId29"/>
+    <p:sldId id="576" r:id="rId30"/>
+    <p:sldId id="618" r:id="rId31"/>
+    <p:sldId id="620" r:id="rId32"/>
+    <p:sldId id="621" r:id="rId33"/>
+    <p:sldId id="578" r:id="rId34"/>
+    <p:sldId id="641" r:id="rId35"/>
+    <p:sldId id="622" r:id="rId36"/>
+    <p:sldId id="623" r:id="rId37"/>
+    <p:sldId id="642" r:id="rId38"/>
+    <p:sldId id="624" r:id="rId39"/>
+    <p:sldId id="625" r:id="rId40"/>
+    <p:sldId id="626" r:id="rId41"/>
+    <p:sldId id="627" r:id="rId42"/>
+    <p:sldId id="581" r:id="rId43"/>
+    <p:sldId id="630" r:id="rId44"/>
+    <p:sldId id="347" r:id="rId45"/>
   </p:sldIdLst>
   <p:sldSz cx="12192000" cy="6858000"/>
   <p:notesSz cx="6858000" cy="9144000"/>
@@ -250,7 +251,7 @@
           <a:p>
             <a:fld id="{58C3D141-1E1C-433C-AD3A-CD56CBBB4F9F}" type="datetimeFigureOut">
               <a:rPr lang="en-IE" smtClean="0"/>
-              <a:t>16/10/2025</a:t>
+              <a:t>18/10/2025</a:t>
             </a:fld>
             <a:endParaRPr lang="en-IE"/>
           </a:p>
@@ -2230,6 +2231,564 @@
 </p:notes>
 </file>
 
+<file path=ppt/notesSlides/notesSlide13.xml><?xml version="1.0" encoding="utf-8"?>
+<p:notes xmlns:a="http://schemas.openxmlformats.org/drawingml/2006/main" xmlns:r="http://schemas.openxmlformats.org/officeDocument/2006/relationships" xmlns:p="http://schemas.openxmlformats.org/presentationml/2006/main">
+  <p:cSld>
+    <p:spTree>
+      <p:nvGrpSpPr>
+        <p:cNvPr id="1" name="">
+          <a:extLst>
+            <a:ext uri="{FF2B5EF4-FFF2-40B4-BE49-F238E27FC236}">
+              <a16:creationId xmlns:a16="http://schemas.microsoft.com/office/drawing/2014/main" id="{B4E27FD2-2004-0F1A-66F2-FF299AB736DD}"/>
+            </a:ext>
+          </a:extLst>
+        </p:cNvPr>
+        <p:cNvGrpSpPr/>
+        <p:nvPr/>
+      </p:nvGrpSpPr>
+      <p:grpSpPr>
+        <a:xfrm>
+          <a:off x="0" y="0"/>
+          <a:ext cx="0" cy="0"/>
+          <a:chOff x="0" y="0"/>
+          <a:chExt cx="0" cy="0"/>
+        </a:xfrm>
+      </p:grpSpPr>
+      <p:sp>
+        <p:nvSpPr>
+          <p:cNvPr id="10242" name="Rectangle 2">
+            <a:extLst>
+              <a:ext uri="{FF2B5EF4-FFF2-40B4-BE49-F238E27FC236}">
+                <a16:creationId xmlns:a16="http://schemas.microsoft.com/office/drawing/2014/main" id="{7972C323-8597-8885-0E3A-9E83B85D46FF}"/>
+              </a:ext>
+            </a:extLst>
+          </p:cNvPr>
+          <p:cNvSpPr>
+            <a:spLocks noGrp="1" noChangeArrowheads="1"/>
+          </p:cNvSpPr>
+          <p:nvPr>
+            <p:ph type="hdr" sz="quarter"/>
+          </p:nvPr>
+        </p:nvSpPr>
+        <p:spPr>
+          <a:noFill/>
+          <a:ln/>
+          <a:extLst>
+            <a:ext uri="{909E8E84-426E-40DD-AFC4-6F175D3DCCD1}">
+              <a14:hiddenFill xmlns:a14="http://schemas.microsoft.com/office/drawing/2010/main">
+                <a:solidFill>
+                  <a:srgbClr val="FFFFFF"/>
+                </a:solidFill>
+              </a14:hiddenFill>
+            </a:ext>
+            <a:ext uri="{91240B29-F687-4F45-9708-019B960494DF}">
+              <a14:hiddenLine xmlns:a14="http://schemas.microsoft.com/office/drawing/2010/main" w="9525">
+                <a:solidFill>
+                  <a:srgbClr val="000000"/>
+                </a:solidFill>
+                <a:miter lim="800000"/>
+                <a:headEnd/>
+                <a:tailEnd/>
+              </a14:hiddenLine>
+            </a:ext>
+          </a:extLst>
+        </p:spPr>
+        <p:txBody>
+          <a:bodyPr/>
+          <a:lstStyle>
+            <a:lvl1pPr>
+              <a:defRPr sz="2400" b="1">
+                <a:solidFill>
+                  <a:schemeClr val="tx1"/>
+                </a:solidFill>
+                <a:latin typeface="Times" pitchFamily="-32" charset="0"/>
+              </a:defRPr>
+            </a:lvl1pPr>
+            <a:lvl2pPr marL="742950" indent="-285750">
+              <a:defRPr sz="2400" b="1">
+                <a:solidFill>
+                  <a:schemeClr val="tx1"/>
+                </a:solidFill>
+                <a:latin typeface="Times" pitchFamily="-32" charset="0"/>
+              </a:defRPr>
+            </a:lvl2pPr>
+            <a:lvl3pPr marL="1143000" indent="-228600">
+              <a:defRPr sz="2400" b="1">
+                <a:solidFill>
+                  <a:schemeClr val="tx1"/>
+                </a:solidFill>
+                <a:latin typeface="Times" pitchFamily="-32" charset="0"/>
+              </a:defRPr>
+            </a:lvl3pPr>
+            <a:lvl4pPr marL="1600200" indent="-228600">
+              <a:defRPr sz="2400" b="1">
+                <a:solidFill>
+                  <a:schemeClr val="tx1"/>
+                </a:solidFill>
+                <a:latin typeface="Times" pitchFamily="-32" charset="0"/>
+              </a:defRPr>
+            </a:lvl4pPr>
+            <a:lvl5pPr marL="2057400" indent="-228600">
+              <a:defRPr sz="2400" b="1">
+                <a:solidFill>
+                  <a:schemeClr val="tx1"/>
+                </a:solidFill>
+                <a:latin typeface="Times" pitchFamily="-32" charset="0"/>
+              </a:defRPr>
+            </a:lvl5pPr>
+            <a:lvl6pPr marL="2514600" indent="-228600" eaLnBrk="0" fontAlgn="base" hangingPunct="0">
+              <a:spcBef>
+                <a:spcPct val="0"/>
+              </a:spcBef>
+              <a:spcAft>
+                <a:spcPct val="0"/>
+              </a:spcAft>
+              <a:defRPr sz="2400" b="1">
+                <a:solidFill>
+                  <a:schemeClr val="tx1"/>
+                </a:solidFill>
+                <a:latin typeface="Times" pitchFamily="-32" charset="0"/>
+              </a:defRPr>
+            </a:lvl6pPr>
+            <a:lvl7pPr marL="2971800" indent="-228600" eaLnBrk="0" fontAlgn="base" hangingPunct="0">
+              <a:spcBef>
+                <a:spcPct val="0"/>
+              </a:spcBef>
+              <a:spcAft>
+                <a:spcPct val="0"/>
+              </a:spcAft>
+              <a:defRPr sz="2400" b="1">
+                <a:solidFill>
+                  <a:schemeClr val="tx1"/>
+                </a:solidFill>
+                <a:latin typeface="Times" pitchFamily="-32" charset="0"/>
+              </a:defRPr>
+            </a:lvl7pPr>
+            <a:lvl8pPr marL="3429000" indent="-228600" eaLnBrk="0" fontAlgn="base" hangingPunct="0">
+              <a:spcBef>
+                <a:spcPct val="0"/>
+              </a:spcBef>
+              <a:spcAft>
+                <a:spcPct val="0"/>
+              </a:spcAft>
+              <a:defRPr sz="2400" b="1">
+                <a:solidFill>
+                  <a:schemeClr val="tx1"/>
+                </a:solidFill>
+                <a:latin typeface="Times" pitchFamily="-32" charset="0"/>
+              </a:defRPr>
+            </a:lvl8pPr>
+            <a:lvl9pPr marL="3886200" indent="-228600" eaLnBrk="0" fontAlgn="base" hangingPunct="0">
+              <a:spcBef>
+                <a:spcPct val="0"/>
+              </a:spcBef>
+              <a:spcAft>
+                <a:spcPct val="0"/>
+              </a:spcAft>
+              <a:defRPr sz="2400" b="1">
+                <a:solidFill>
+                  <a:schemeClr val="tx1"/>
+                </a:solidFill>
+                <a:latin typeface="Times" pitchFamily="-32" charset="0"/>
+              </a:defRPr>
+            </a:lvl9pPr>
+          </a:lstStyle>
+          <a:p>
+            <a:r>
+              <a:rPr lang="en-GB" sz="1200" b="0">
+                <a:latin typeface="Times New Roman" pitchFamily="-32" charset="0"/>
+              </a:rPr>
+              <a:t>Objects First with Java</a:t>
+            </a:r>
+          </a:p>
+        </p:txBody>
+      </p:sp>
+      <p:sp>
+        <p:nvSpPr>
+          <p:cNvPr id="10243" name="Rectangle 6">
+            <a:extLst>
+              <a:ext uri="{FF2B5EF4-FFF2-40B4-BE49-F238E27FC236}">
+                <a16:creationId xmlns:a16="http://schemas.microsoft.com/office/drawing/2014/main" id="{625DD2EA-9C88-5384-DA18-D854E93339D2}"/>
+              </a:ext>
+            </a:extLst>
+          </p:cNvPr>
+          <p:cNvSpPr>
+            <a:spLocks noGrp="1" noChangeArrowheads="1"/>
+          </p:cNvSpPr>
+          <p:nvPr>
+            <p:ph type="ftr" sz="quarter" idx="4"/>
+          </p:nvPr>
+        </p:nvSpPr>
+        <p:spPr>
+          <a:noFill/>
+          <a:ln/>
+          <a:extLst>
+            <a:ext uri="{909E8E84-426E-40DD-AFC4-6F175D3DCCD1}">
+              <a14:hiddenFill xmlns:a14="http://schemas.microsoft.com/office/drawing/2010/main">
+                <a:solidFill>
+                  <a:srgbClr val="FFFFFF"/>
+                </a:solidFill>
+              </a14:hiddenFill>
+            </a:ext>
+            <a:ext uri="{91240B29-F687-4F45-9708-019B960494DF}">
+              <a14:hiddenLine xmlns:a14="http://schemas.microsoft.com/office/drawing/2010/main" w="9525">
+                <a:solidFill>
+                  <a:srgbClr val="000000"/>
+                </a:solidFill>
+                <a:miter lim="800000"/>
+                <a:headEnd/>
+                <a:tailEnd/>
+              </a14:hiddenLine>
+            </a:ext>
+          </a:extLst>
+        </p:spPr>
+        <p:txBody>
+          <a:bodyPr/>
+          <a:lstStyle>
+            <a:lvl1pPr>
+              <a:defRPr sz="2400" b="1">
+                <a:solidFill>
+                  <a:schemeClr val="tx1"/>
+                </a:solidFill>
+                <a:latin typeface="Times" pitchFamily="-32" charset="0"/>
+              </a:defRPr>
+            </a:lvl1pPr>
+            <a:lvl2pPr marL="742950" indent="-285750">
+              <a:defRPr sz="2400" b="1">
+                <a:solidFill>
+                  <a:schemeClr val="tx1"/>
+                </a:solidFill>
+                <a:latin typeface="Times" pitchFamily="-32" charset="0"/>
+              </a:defRPr>
+            </a:lvl2pPr>
+            <a:lvl3pPr marL="1143000" indent="-228600">
+              <a:defRPr sz="2400" b="1">
+                <a:solidFill>
+                  <a:schemeClr val="tx1"/>
+                </a:solidFill>
+                <a:latin typeface="Times" pitchFamily="-32" charset="0"/>
+              </a:defRPr>
+            </a:lvl3pPr>
+            <a:lvl4pPr marL="1600200" indent="-228600">
+              <a:defRPr sz="2400" b="1">
+                <a:solidFill>
+                  <a:schemeClr val="tx1"/>
+                </a:solidFill>
+                <a:latin typeface="Times" pitchFamily="-32" charset="0"/>
+              </a:defRPr>
+            </a:lvl4pPr>
+            <a:lvl5pPr marL="2057400" indent="-228600">
+              <a:defRPr sz="2400" b="1">
+                <a:solidFill>
+                  <a:schemeClr val="tx1"/>
+                </a:solidFill>
+                <a:latin typeface="Times" pitchFamily="-32" charset="0"/>
+              </a:defRPr>
+            </a:lvl5pPr>
+            <a:lvl6pPr marL="2514600" indent="-228600" eaLnBrk="0" fontAlgn="base" hangingPunct="0">
+              <a:spcBef>
+                <a:spcPct val="0"/>
+              </a:spcBef>
+              <a:spcAft>
+                <a:spcPct val="0"/>
+              </a:spcAft>
+              <a:defRPr sz="2400" b="1">
+                <a:solidFill>
+                  <a:schemeClr val="tx1"/>
+                </a:solidFill>
+                <a:latin typeface="Times" pitchFamily="-32" charset="0"/>
+              </a:defRPr>
+            </a:lvl6pPr>
+            <a:lvl7pPr marL="2971800" indent="-228600" eaLnBrk="0" fontAlgn="base" hangingPunct="0">
+              <a:spcBef>
+                <a:spcPct val="0"/>
+              </a:spcBef>
+              <a:spcAft>
+                <a:spcPct val="0"/>
+              </a:spcAft>
+              <a:defRPr sz="2400" b="1">
+                <a:solidFill>
+                  <a:schemeClr val="tx1"/>
+                </a:solidFill>
+                <a:latin typeface="Times" pitchFamily="-32" charset="0"/>
+              </a:defRPr>
+            </a:lvl7pPr>
+            <a:lvl8pPr marL="3429000" indent="-228600" eaLnBrk="0" fontAlgn="base" hangingPunct="0">
+              <a:spcBef>
+                <a:spcPct val="0"/>
+              </a:spcBef>
+              <a:spcAft>
+                <a:spcPct val="0"/>
+              </a:spcAft>
+              <a:defRPr sz="2400" b="1">
+                <a:solidFill>
+                  <a:schemeClr val="tx1"/>
+                </a:solidFill>
+                <a:latin typeface="Times" pitchFamily="-32" charset="0"/>
+              </a:defRPr>
+            </a:lvl8pPr>
+            <a:lvl9pPr marL="3886200" indent="-228600" eaLnBrk="0" fontAlgn="base" hangingPunct="0">
+              <a:spcBef>
+                <a:spcPct val="0"/>
+              </a:spcBef>
+              <a:spcAft>
+                <a:spcPct val="0"/>
+              </a:spcAft>
+              <a:defRPr sz="2400" b="1">
+                <a:solidFill>
+                  <a:schemeClr val="tx1"/>
+                </a:solidFill>
+                <a:latin typeface="Times" pitchFamily="-32" charset="0"/>
+              </a:defRPr>
+            </a:lvl9pPr>
+          </a:lstStyle>
+          <a:p>
+            <a:r>
+              <a:rPr lang="en-GB" sz="1200" b="0">
+                <a:latin typeface="Times New Roman" pitchFamily="-32" charset="0"/>
+              </a:rPr>
+              <a:t>© David J. Barnes and Michael Kölling</a:t>
+            </a:r>
+          </a:p>
+        </p:txBody>
+      </p:sp>
+      <p:sp>
+        <p:nvSpPr>
+          <p:cNvPr id="10244" name="Rectangle 7">
+            <a:extLst>
+              <a:ext uri="{FF2B5EF4-FFF2-40B4-BE49-F238E27FC236}">
+                <a16:creationId xmlns:a16="http://schemas.microsoft.com/office/drawing/2014/main" id="{47C10434-3C5E-0904-BA4B-3DA63A9306A6}"/>
+              </a:ext>
+            </a:extLst>
+          </p:cNvPr>
+          <p:cNvSpPr>
+            <a:spLocks noGrp="1" noChangeArrowheads="1"/>
+          </p:cNvSpPr>
+          <p:nvPr>
+            <p:ph type="sldNum" sz="quarter" idx="5"/>
+          </p:nvPr>
+        </p:nvSpPr>
+        <p:spPr>
+          <a:noFill/>
+          <a:ln/>
+          <a:extLst>
+            <a:ext uri="{909E8E84-426E-40DD-AFC4-6F175D3DCCD1}">
+              <a14:hiddenFill xmlns:a14="http://schemas.microsoft.com/office/drawing/2010/main">
+                <a:solidFill>
+                  <a:srgbClr val="FFFFFF"/>
+                </a:solidFill>
+              </a14:hiddenFill>
+            </a:ext>
+            <a:ext uri="{91240B29-F687-4F45-9708-019B960494DF}">
+              <a14:hiddenLine xmlns:a14="http://schemas.microsoft.com/office/drawing/2010/main" w="9525">
+                <a:solidFill>
+                  <a:srgbClr val="000000"/>
+                </a:solidFill>
+                <a:miter lim="800000"/>
+                <a:headEnd/>
+                <a:tailEnd/>
+              </a14:hiddenLine>
+            </a:ext>
+          </a:extLst>
+        </p:spPr>
+        <p:txBody>
+          <a:bodyPr/>
+          <a:lstStyle>
+            <a:lvl1pPr>
+              <a:defRPr sz="2400" b="1">
+                <a:solidFill>
+                  <a:schemeClr val="tx1"/>
+                </a:solidFill>
+                <a:latin typeface="Times" pitchFamily="-32" charset="0"/>
+              </a:defRPr>
+            </a:lvl1pPr>
+            <a:lvl2pPr marL="742950" indent="-285750">
+              <a:defRPr sz="2400" b="1">
+                <a:solidFill>
+                  <a:schemeClr val="tx1"/>
+                </a:solidFill>
+                <a:latin typeface="Times" pitchFamily="-32" charset="0"/>
+              </a:defRPr>
+            </a:lvl2pPr>
+            <a:lvl3pPr marL="1143000" indent="-228600">
+              <a:defRPr sz="2400" b="1">
+                <a:solidFill>
+                  <a:schemeClr val="tx1"/>
+                </a:solidFill>
+                <a:latin typeface="Times" pitchFamily="-32" charset="0"/>
+              </a:defRPr>
+            </a:lvl3pPr>
+            <a:lvl4pPr marL="1600200" indent="-228600">
+              <a:defRPr sz="2400" b="1">
+                <a:solidFill>
+                  <a:schemeClr val="tx1"/>
+                </a:solidFill>
+                <a:latin typeface="Times" pitchFamily="-32" charset="0"/>
+              </a:defRPr>
+            </a:lvl4pPr>
+            <a:lvl5pPr marL="2057400" indent="-228600">
+              <a:defRPr sz="2400" b="1">
+                <a:solidFill>
+                  <a:schemeClr val="tx1"/>
+                </a:solidFill>
+                <a:latin typeface="Times" pitchFamily="-32" charset="0"/>
+              </a:defRPr>
+            </a:lvl5pPr>
+            <a:lvl6pPr marL="2514600" indent="-228600" eaLnBrk="0" fontAlgn="base" hangingPunct="0">
+              <a:spcBef>
+                <a:spcPct val="0"/>
+              </a:spcBef>
+              <a:spcAft>
+                <a:spcPct val="0"/>
+              </a:spcAft>
+              <a:defRPr sz="2400" b="1">
+                <a:solidFill>
+                  <a:schemeClr val="tx1"/>
+                </a:solidFill>
+                <a:latin typeface="Times" pitchFamily="-32" charset="0"/>
+              </a:defRPr>
+            </a:lvl6pPr>
+            <a:lvl7pPr marL="2971800" indent="-228600" eaLnBrk="0" fontAlgn="base" hangingPunct="0">
+              <a:spcBef>
+                <a:spcPct val="0"/>
+              </a:spcBef>
+              <a:spcAft>
+                <a:spcPct val="0"/>
+              </a:spcAft>
+              <a:defRPr sz="2400" b="1">
+                <a:solidFill>
+                  <a:schemeClr val="tx1"/>
+                </a:solidFill>
+                <a:latin typeface="Times" pitchFamily="-32" charset="0"/>
+              </a:defRPr>
+            </a:lvl7pPr>
+            <a:lvl8pPr marL="3429000" indent="-228600" eaLnBrk="0" fontAlgn="base" hangingPunct="0">
+              <a:spcBef>
+                <a:spcPct val="0"/>
+              </a:spcBef>
+              <a:spcAft>
+                <a:spcPct val="0"/>
+              </a:spcAft>
+              <a:defRPr sz="2400" b="1">
+                <a:solidFill>
+                  <a:schemeClr val="tx1"/>
+                </a:solidFill>
+                <a:latin typeface="Times" pitchFamily="-32" charset="0"/>
+              </a:defRPr>
+            </a:lvl8pPr>
+            <a:lvl9pPr marL="3886200" indent="-228600" eaLnBrk="0" fontAlgn="base" hangingPunct="0">
+              <a:spcBef>
+                <a:spcPct val="0"/>
+              </a:spcBef>
+              <a:spcAft>
+                <a:spcPct val="0"/>
+              </a:spcAft>
+              <a:defRPr sz="2400" b="1">
+                <a:solidFill>
+                  <a:schemeClr val="tx1"/>
+                </a:solidFill>
+                <a:latin typeface="Times" pitchFamily="-32" charset="0"/>
+              </a:defRPr>
+            </a:lvl9pPr>
+          </a:lstStyle>
+          <a:p>
+            <a:fld id="{F27CABD1-01BD-4148-8592-4B26A6C0FEC4}" type="slidenum">
+              <a:rPr lang="en-GB" sz="1200" b="0" smtClean="0">
+                <a:latin typeface="Times New Roman" pitchFamily="-32" charset="0"/>
+              </a:rPr>
+              <a:pPr/>
+              <a:t>25</a:t>
+            </a:fld>
+            <a:endParaRPr lang="en-GB" sz="1200" b="0">
+              <a:latin typeface="Times New Roman" pitchFamily="-32" charset="0"/>
+            </a:endParaRPr>
+          </a:p>
+        </p:txBody>
+      </p:sp>
+      <p:sp>
+        <p:nvSpPr>
+          <p:cNvPr id="10245" name="Rectangle 2">
+            <a:extLst>
+              <a:ext uri="{FF2B5EF4-FFF2-40B4-BE49-F238E27FC236}">
+                <a16:creationId xmlns:a16="http://schemas.microsoft.com/office/drawing/2014/main" id="{A9BF46B6-062D-502A-7457-42AACEB098C9}"/>
+              </a:ext>
+            </a:extLst>
+          </p:cNvPr>
+          <p:cNvSpPr>
+            <a:spLocks noGrp="1" noRot="1" noChangeAspect="1" noChangeArrowheads="1" noTextEdit="1"/>
+          </p:cNvSpPr>
+          <p:nvPr>
+            <p:ph type="sldImg"/>
+          </p:nvPr>
+        </p:nvSpPr>
+        <p:spPr>
+          <a:xfrm>
+            <a:off x="381000" y="685800"/>
+            <a:ext cx="6096000" cy="3429000"/>
+          </a:xfrm>
+          <a:ln/>
+        </p:spPr>
+      </p:sp>
+      <p:sp>
+        <p:nvSpPr>
+          <p:cNvPr id="10246" name="Rectangle 3">
+            <a:extLst>
+              <a:ext uri="{FF2B5EF4-FFF2-40B4-BE49-F238E27FC236}">
+                <a16:creationId xmlns:a16="http://schemas.microsoft.com/office/drawing/2014/main" id="{71CD12A1-8B34-2798-18FB-D4CA267B4D3E}"/>
+              </a:ext>
+            </a:extLst>
+          </p:cNvPr>
+          <p:cNvSpPr>
+            <a:spLocks noGrp="1" noChangeArrowheads="1"/>
+          </p:cNvSpPr>
+          <p:nvPr>
+            <p:ph type="body" idx="1"/>
+          </p:nvPr>
+        </p:nvSpPr>
+        <p:spPr>
+          <a:noFill/>
+          <a:ln/>
+          <a:extLst>
+            <a:ext uri="{909E8E84-426E-40DD-AFC4-6F175D3DCCD1}">
+              <a14:hiddenFill xmlns:a14="http://schemas.microsoft.com/office/drawing/2010/main">
+                <a:solidFill>
+                  <a:srgbClr val="FFFFFF"/>
+                </a:solidFill>
+              </a14:hiddenFill>
+            </a:ext>
+            <a:ext uri="{91240B29-F687-4F45-9708-019B960494DF}">
+              <a14:hiddenLine xmlns:a14="http://schemas.microsoft.com/office/drawing/2010/main" w="9525">
+                <a:solidFill>
+                  <a:srgbClr val="000000"/>
+                </a:solidFill>
+                <a:miter lim="800000"/>
+                <a:headEnd/>
+                <a:tailEnd/>
+              </a14:hiddenLine>
+            </a:ext>
+          </a:extLst>
+        </p:spPr>
+        <p:txBody>
+          <a:bodyPr/>
+          <a:lstStyle/>
+          <a:p>
+            <a:endParaRPr lang="en-US" dirty="0"/>
+          </a:p>
+        </p:txBody>
+      </p:sp>
+    </p:spTree>
+    <p:extLst>
+      <p:ext uri="{BB962C8B-B14F-4D97-AF65-F5344CB8AC3E}">
+        <p14:creationId xmlns:p14="http://schemas.microsoft.com/office/powerpoint/2010/main" val="3351140505"/>
+      </p:ext>
+    </p:extLst>
+  </p:cSld>
+  <p:clrMapOvr>
+    <a:masterClrMapping/>
+  </p:clrMapOvr>
+</p:notes>
+</file>
+
 <file path=ppt/notesSlides/notesSlide2.xml><?xml version="1.0" encoding="utf-8"?>
 <p:notes xmlns:a="http://schemas.openxmlformats.org/drawingml/2006/main" xmlns:r="http://schemas.openxmlformats.org/officeDocument/2006/relationships" xmlns:p="http://schemas.openxmlformats.org/presentationml/2006/main">
   <p:cSld>
@@ -6588,7 +7147,7 @@
             <a:fld id="{1D8BD707-D9CF-40AE-B4C6-C98DA3205C09}" type="datetimeFigureOut">
               <a:rPr lang="en-US" smtClean="0"/>
               <a:pPr/>
-              <a:t>10/16/25</a:t>
+              <a:t>10/18/25</a:t>
             </a:fld>
             <a:endParaRPr lang="en-US"/>
           </a:p>
@@ -6760,7 +7319,7 @@
             <a:fld id="{1D8BD707-D9CF-40AE-B4C6-C98DA3205C09}" type="datetimeFigureOut">
               <a:rPr lang="en-US" smtClean="0"/>
               <a:pPr/>
-              <a:t>10/16/25</a:t>
+              <a:t>10/18/25</a:t>
             </a:fld>
             <a:endParaRPr lang="en-US"/>
           </a:p>
@@ -6942,7 +7501,7 @@
             <a:fld id="{1D8BD707-D9CF-40AE-B4C6-C98DA3205C09}" type="datetimeFigureOut">
               <a:rPr lang="en-US" smtClean="0"/>
               <a:pPr/>
-              <a:t>10/16/25</a:t>
+              <a:t>10/18/25</a:t>
             </a:fld>
             <a:endParaRPr lang="en-US"/>
           </a:p>
@@ -7581,7 +8140,7 @@
             <a:fld id="{1D8BD707-D9CF-40AE-B4C6-C98DA3205C09}" type="datetimeFigureOut">
               <a:rPr lang="en-US" smtClean="0"/>
               <a:pPr/>
-              <a:t>10/16/25</a:t>
+              <a:t>10/18/25</a:t>
             </a:fld>
             <a:endParaRPr lang="en-US"/>
           </a:p>
@@ -7999,7 +8558,7 @@
             <a:fld id="{1D8BD707-D9CF-40AE-B4C6-C98DA3205C09}" type="datetimeFigureOut">
               <a:rPr lang="en-US" smtClean="0"/>
               <a:pPr/>
-              <a:t>10/16/25</a:t>
+              <a:t>10/18/25</a:t>
             </a:fld>
             <a:endParaRPr lang="en-US"/>
           </a:p>
@@ -8300,7 +8859,7 @@
             <a:fld id="{1D8BD707-D9CF-40AE-B4C6-C98DA3205C09}" type="datetimeFigureOut">
               <a:rPr lang="en-US" smtClean="0"/>
               <a:pPr/>
-              <a:t>10/16/25</a:t>
+              <a:t>10/18/25</a:t>
             </a:fld>
             <a:endParaRPr lang="en-US"/>
           </a:p>
@@ -8889,7 +9448,7 @@
             <a:fld id="{1D8BD707-D9CF-40AE-B4C6-C98DA3205C09}" type="datetimeFigureOut">
               <a:rPr lang="en-US" smtClean="0"/>
               <a:pPr/>
-              <a:t>10/16/25</a:t>
+              <a:t>10/18/25</a:t>
             </a:fld>
             <a:endParaRPr lang="en-US"/>
           </a:p>
@@ -9137,7 +9696,7 @@
             <a:fld id="{1D8BD707-D9CF-40AE-B4C6-C98DA3205C09}" type="datetimeFigureOut">
               <a:rPr lang="en-US" smtClean="0"/>
               <a:pPr/>
-              <a:t>10/16/25</a:t>
+              <a:t>10/18/25</a:t>
             </a:fld>
             <a:endParaRPr lang="en-US"/>
           </a:p>
@@ -9392,7 +9951,7 @@
             <a:fld id="{1D8BD707-D9CF-40AE-B4C6-C98DA3205C09}" type="datetimeFigureOut">
               <a:rPr lang="en-US" smtClean="0"/>
               <a:pPr/>
-              <a:t>10/16/25</a:t>
+              <a:t>10/18/25</a:t>
             </a:fld>
             <a:endParaRPr lang="en-US"/>
           </a:p>
@@ -9671,7 +10230,7 @@
             <a:fld id="{1D8BD707-D9CF-40AE-B4C6-C98DA3205C09}" type="datetimeFigureOut">
               <a:rPr lang="en-US" smtClean="0"/>
               <a:pPr/>
-              <a:t>10/16/25</a:t>
+              <a:t>10/18/25</a:t>
             </a:fld>
             <a:endParaRPr lang="en-US"/>
           </a:p>
@@ -9930,7 +10489,7 @@
             <a:fld id="{1D8BD707-D9CF-40AE-B4C6-C98DA3205C09}" type="datetimeFigureOut">
               <a:rPr lang="en-US" smtClean="0"/>
               <a:pPr/>
-              <a:t>10/16/25</a:t>
+              <a:t>10/18/25</a:t>
             </a:fld>
             <a:endParaRPr lang="en-US"/>
           </a:p>
@@ -10150,7 +10709,7 @@
             <a:fld id="{1D8BD707-D9CF-40AE-B4C6-C98DA3205C09}" type="datetimeFigureOut">
               <a:rPr lang="en-US" smtClean="0"/>
               <a:pPr/>
-              <a:t>10/16/25</a:t>
+              <a:t>10/18/25</a:t>
             </a:fld>
             <a:endParaRPr lang="en-US"/>
           </a:p>
@@ -22072,6 +22631,1198 @@
   <p:cSld>
     <p:spTree>
       <p:nvGrpSpPr>
+        <p:cNvPr id="1" name="">
+          <a:extLst>
+            <a:ext uri="{FF2B5EF4-FFF2-40B4-BE49-F238E27FC236}">
+              <a16:creationId xmlns:a16="http://schemas.microsoft.com/office/drawing/2014/main" id="{01983F16-CC2D-0BB0-130B-1C0BA0FFFAF4}"/>
+            </a:ext>
+          </a:extLst>
+        </p:cNvPr>
+        <p:cNvGrpSpPr/>
+        <p:nvPr/>
+      </p:nvGrpSpPr>
+      <p:grpSpPr>
+        <a:xfrm>
+          <a:off x="0" y="0"/>
+          <a:ext cx="0" cy="0"/>
+          <a:chOff x="0" y="0"/>
+          <a:chExt cx="0" cy="0"/>
+        </a:xfrm>
+      </p:grpSpPr>
+      <p:sp>
+        <p:nvSpPr>
+          <p:cNvPr id="3075" name="Rectangle 2">
+            <a:extLst>
+              <a:ext uri="{FF2B5EF4-FFF2-40B4-BE49-F238E27FC236}">
+                <a16:creationId xmlns:a16="http://schemas.microsoft.com/office/drawing/2014/main" id="{4EB12C6B-D91E-AA70-1576-463AA9625818}"/>
+              </a:ext>
+            </a:extLst>
+          </p:cNvPr>
+          <p:cNvSpPr>
+            <a:spLocks noGrp="1" noChangeArrowheads="1"/>
+          </p:cNvSpPr>
+          <p:nvPr>
+            <p:ph type="title"/>
+          </p:nvPr>
+        </p:nvSpPr>
+        <p:spPr/>
+        <p:txBody>
+          <a:bodyPr>
+            <a:normAutofit fontScale="90000"/>
+          </a:bodyPr>
+          <a:lstStyle/>
+          <a:p>
+            <a:pPr algn="ctr"/>
+            <a:r>
+              <a:rPr lang="en-IE" dirty="0"/>
+              <a:t>Alternative way of declaring and initialising an array</a:t>
+            </a:r>
+            <a:endParaRPr lang="en-GB" dirty="0"/>
+          </a:p>
+        </p:txBody>
+      </p:sp>
+      <p:sp>
+        <p:nvSpPr>
+          <p:cNvPr id="17" name="Rectangle 5">
+            <a:extLst>
+              <a:ext uri="{FF2B5EF4-FFF2-40B4-BE49-F238E27FC236}">
+                <a16:creationId xmlns:a16="http://schemas.microsoft.com/office/drawing/2014/main" id="{6EE45C58-488B-665D-2195-0E00C512958B}"/>
+              </a:ext>
+            </a:extLst>
+          </p:cNvPr>
+          <p:cNvSpPr>
+            <a:spLocks noChangeArrowheads="1"/>
+          </p:cNvSpPr>
+          <p:nvPr/>
+        </p:nvSpPr>
+        <p:spPr bwMode="auto">
+          <a:xfrm>
+            <a:off x="7691865" y="2678251"/>
+            <a:ext cx="762000" cy="533400"/>
+          </a:xfrm>
+          <a:prstGeom prst="rect">
+            <a:avLst/>
+          </a:prstGeom>
+          <a:noFill/>
+          <a:ln w="19050">
+            <a:solidFill>
+              <a:schemeClr val="tx1"/>
+            </a:solidFill>
+            <a:miter lim="800000"/>
+            <a:headEnd/>
+            <a:tailEnd/>
+          </a:ln>
+          <a:extLst>
+            <a:ext uri="{909E8E84-426E-40DD-AFC4-6F175D3DCCD1}">
+              <a14:hiddenFill xmlns:a14="http://schemas.microsoft.com/office/drawing/2010/main">
+                <a:solidFill>
+                  <a:srgbClr val="FFFFFF"/>
+                </a:solidFill>
+              </a14:hiddenFill>
+            </a:ext>
+          </a:extLst>
+        </p:spPr>
+        <p:txBody>
+          <a:bodyPr wrap="none" anchor="ctr"/>
+          <a:lstStyle/>
+          <a:p>
+            <a:endParaRPr lang="en-IE"/>
+          </a:p>
+        </p:txBody>
+      </p:sp>
+      <p:sp>
+        <p:nvSpPr>
+          <p:cNvPr id="18" name="Text Box 11">
+            <a:extLst>
+              <a:ext uri="{FF2B5EF4-FFF2-40B4-BE49-F238E27FC236}">
+                <a16:creationId xmlns:a16="http://schemas.microsoft.com/office/drawing/2014/main" id="{084EA03F-86A3-0B65-1DE2-EDAE9E3B39C0}"/>
+              </a:ext>
+            </a:extLst>
+          </p:cNvPr>
+          <p:cNvSpPr txBox="1">
+            <a:spLocks noChangeArrowheads="1"/>
+          </p:cNvSpPr>
+          <p:nvPr/>
+        </p:nvSpPr>
+        <p:spPr bwMode="auto">
+          <a:xfrm>
+            <a:off x="7303724" y="2133600"/>
+            <a:ext cx="1905000" cy="523220"/>
+          </a:xfrm>
+          <a:prstGeom prst="rect">
+            <a:avLst/>
+          </a:prstGeom>
+          <a:noFill/>
+          <a:ln>
+            <a:noFill/>
+          </a:ln>
+          <a:extLst>
+            <a:ext uri="{909E8E84-426E-40DD-AFC4-6F175D3DCCD1}">
+              <a14:hiddenFill xmlns:a14="http://schemas.microsoft.com/office/drawing/2010/main">
+                <a:solidFill>
+                  <a:srgbClr val="FFFFFF"/>
+                </a:solidFill>
+              </a14:hiddenFill>
+            </a:ext>
+            <a:ext uri="{91240B29-F687-4F45-9708-019B960494DF}">
+              <a14:hiddenLine xmlns:a14="http://schemas.microsoft.com/office/drawing/2010/main" w="9525">
+                <a:solidFill>
+                  <a:srgbClr val="000000"/>
+                </a:solidFill>
+                <a:miter lim="800000"/>
+                <a:headEnd/>
+                <a:tailEnd/>
+              </a14:hiddenLine>
+            </a:ext>
+          </a:extLst>
+        </p:spPr>
+        <p:txBody>
+          <a:bodyPr wrap="square">
+            <a:spAutoFit/>
+          </a:bodyPr>
+          <a:lstStyle>
+            <a:lvl1pPr>
+              <a:defRPr sz="2400" b="1">
+                <a:solidFill>
+                  <a:schemeClr val="tx1"/>
+                </a:solidFill>
+                <a:latin typeface="Times" pitchFamily="-32" charset="0"/>
+              </a:defRPr>
+            </a:lvl1pPr>
+            <a:lvl2pPr marL="742950" indent="-285750">
+              <a:defRPr sz="2400" b="1">
+                <a:solidFill>
+                  <a:schemeClr val="tx1"/>
+                </a:solidFill>
+                <a:latin typeface="Times" pitchFamily="-32" charset="0"/>
+              </a:defRPr>
+            </a:lvl2pPr>
+            <a:lvl3pPr marL="1143000" indent="-228600">
+              <a:defRPr sz="2400" b="1">
+                <a:solidFill>
+                  <a:schemeClr val="tx1"/>
+                </a:solidFill>
+                <a:latin typeface="Times" pitchFamily="-32" charset="0"/>
+              </a:defRPr>
+            </a:lvl3pPr>
+            <a:lvl4pPr marL="1600200" indent="-228600">
+              <a:defRPr sz="2400" b="1">
+                <a:solidFill>
+                  <a:schemeClr val="tx1"/>
+                </a:solidFill>
+                <a:latin typeface="Times" pitchFamily="-32" charset="0"/>
+              </a:defRPr>
+            </a:lvl4pPr>
+            <a:lvl5pPr marL="2057400" indent="-228600">
+              <a:defRPr sz="2400" b="1">
+                <a:solidFill>
+                  <a:schemeClr val="tx1"/>
+                </a:solidFill>
+                <a:latin typeface="Times" pitchFamily="-32" charset="0"/>
+              </a:defRPr>
+            </a:lvl5pPr>
+            <a:lvl6pPr marL="2514600" indent="-228600" eaLnBrk="0" fontAlgn="base" hangingPunct="0">
+              <a:spcBef>
+                <a:spcPct val="0"/>
+              </a:spcBef>
+              <a:spcAft>
+                <a:spcPct val="0"/>
+              </a:spcAft>
+              <a:defRPr sz="2400" b="1">
+                <a:solidFill>
+                  <a:schemeClr val="tx1"/>
+                </a:solidFill>
+                <a:latin typeface="Times" pitchFamily="-32" charset="0"/>
+              </a:defRPr>
+            </a:lvl6pPr>
+            <a:lvl7pPr marL="2971800" indent="-228600" eaLnBrk="0" fontAlgn="base" hangingPunct="0">
+              <a:spcBef>
+                <a:spcPct val="0"/>
+              </a:spcBef>
+              <a:spcAft>
+                <a:spcPct val="0"/>
+              </a:spcAft>
+              <a:defRPr sz="2400" b="1">
+                <a:solidFill>
+                  <a:schemeClr val="tx1"/>
+                </a:solidFill>
+                <a:latin typeface="Times" pitchFamily="-32" charset="0"/>
+              </a:defRPr>
+            </a:lvl7pPr>
+            <a:lvl8pPr marL="3429000" indent="-228600" eaLnBrk="0" fontAlgn="base" hangingPunct="0">
+              <a:spcBef>
+                <a:spcPct val="0"/>
+              </a:spcBef>
+              <a:spcAft>
+                <a:spcPct val="0"/>
+              </a:spcAft>
+              <a:defRPr sz="2400" b="1">
+                <a:solidFill>
+                  <a:schemeClr val="tx1"/>
+                </a:solidFill>
+                <a:latin typeface="Times" pitchFamily="-32" charset="0"/>
+              </a:defRPr>
+            </a:lvl8pPr>
+            <a:lvl9pPr marL="3886200" indent="-228600" eaLnBrk="0" fontAlgn="base" hangingPunct="0">
+              <a:spcBef>
+                <a:spcPct val="0"/>
+              </a:spcBef>
+              <a:spcAft>
+                <a:spcPct val="0"/>
+              </a:spcAft>
+              <a:defRPr sz="2400" b="1">
+                <a:solidFill>
+                  <a:schemeClr val="tx1"/>
+                </a:solidFill>
+                <a:latin typeface="Times" pitchFamily="-32" charset="0"/>
+              </a:defRPr>
+            </a:lvl9pPr>
+          </a:lstStyle>
+          <a:p>
+            <a:pPr eaLnBrk="1" hangingPunct="1"/>
+            <a:r>
+              <a:rPr lang="en-GB" sz="2800" dirty="0">
+                <a:latin typeface="Courier New" pitchFamily="-32" charset="0"/>
+              </a:rPr>
+              <a:t>numbers</a:t>
+            </a:r>
+          </a:p>
+        </p:txBody>
+      </p:sp>
+      <p:cxnSp>
+        <p:nvCxnSpPr>
+          <p:cNvPr id="8" name="Straight Connector 7">
+            <a:extLst>
+              <a:ext uri="{FF2B5EF4-FFF2-40B4-BE49-F238E27FC236}">
+                <a16:creationId xmlns:a16="http://schemas.microsoft.com/office/drawing/2014/main" id="{C60B1258-DFB2-B38C-002D-717767BF3104}"/>
+              </a:ext>
+            </a:extLst>
+          </p:cNvPr>
+          <p:cNvCxnSpPr/>
+          <p:nvPr/>
+        </p:nvCxnSpPr>
+        <p:spPr>
+          <a:xfrm>
+            <a:off x="7086600" y="1447800"/>
+            <a:ext cx="0" cy="5516562"/>
+          </a:xfrm>
+          <a:prstGeom prst="line">
+            <a:avLst/>
+          </a:prstGeom>
+          <a:ln w="12700"/>
+        </p:spPr>
+        <p:style>
+          <a:lnRef idx="1">
+            <a:schemeClr val="dk1"/>
+          </a:lnRef>
+          <a:fillRef idx="0">
+            <a:schemeClr val="dk1"/>
+          </a:fillRef>
+          <a:effectRef idx="0">
+            <a:schemeClr val="dk1"/>
+          </a:effectRef>
+          <a:fontRef idx="minor">
+            <a:schemeClr val="tx1"/>
+          </a:fontRef>
+        </p:style>
+      </p:cxnSp>
+      <p:graphicFrame>
+        <p:nvGraphicFramePr>
+          <p:cNvPr id="9" name="Table 8">
+            <a:extLst>
+              <a:ext uri="{FF2B5EF4-FFF2-40B4-BE49-F238E27FC236}">
+                <a16:creationId xmlns:a16="http://schemas.microsoft.com/office/drawing/2014/main" id="{5F22F46A-EC14-E260-EB02-2C20791BF4EF}"/>
+              </a:ext>
+            </a:extLst>
+          </p:cNvPr>
+          <p:cNvGraphicFramePr>
+            <a:graphicFrameLocks noGrp="1"/>
+          </p:cNvGraphicFramePr>
+          <p:nvPr>
+            <p:extLst>
+              <p:ext uri="{D42A27DB-BD31-4B8C-83A1-F6EECF244321}">
+                <p14:modId xmlns:p14="http://schemas.microsoft.com/office/powerpoint/2010/main" val="884089672"/>
+              </p:ext>
+            </p:extLst>
+          </p:nvPr>
+        </p:nvGraphicFramePr>
+        <p:xfrm>
+          <a:off x="8153400" y="4135645"/>
+          <a:ext cx="2209801" cy="1828800"/>
+        </p:xfrm>
+        <a:graphic>
+          <a:graphicData uri="http://schemas.openxmlformats.org/drawingml/2006/table">
+            <a:tbl>
+              <a:tblPr>
+                <a:tableStyleId>{3C2FFA5D-87B4-456A-9821-1D502468CF0F}</a:tableStyleId>
+              </a:tblPr>
+              <a:tblGrid>
+                <a:gridCol w="685800">
+                  <a:extLst>
+                    <a:ext uri="{9D8B030D-6E8A-4147-A177-3AD203B41FA5}">
+                      <a16:colId xmlns:a16="http://schemas.microsoft.com/office/drawing/2014/main" val="3029030374"/>
+                    </a:ext>
+                  </a:extLst>
+                </a:gridCol>
+                <a:gridCol w="1524001">
+                  <a:extLst>
+                    <a:ext uri="{9D8B030D-6E8A-4147-A177-3AD203B41FA5}">
+                      <a16:colId xmlns:a16="http://schemas.microsoft.com/office/drawing/2014/main" val="4245855580"/>
+                    </a:ext>
+                  </a:extLst>
+                </a:gridCol>
+              </a:tblGrid>
+              <a:tr h="374610">
+                <a:tc>
+                  <a:txBody>
+                    <a:bodyPr/>
+                    <a:lstStyle/>
+                    <a:p>
+                      <a:pPr algn="ctr"/>
+                      <a:r>
+                        <a:rPr lang="en-IE" sz="2400" b="1" dirty="0">
+                          <a:solidFill>
+                            <a:srgbClr val="0070C0"/>
+                          </a:solidFill>
+                        </a:rPr>
+                        <a:t>0</a:t>
+                      </a:r>
+                    </a:p>
+                  </a:txBody>
+                  <a:tcPr/>
+                </a:tc>
+                <a:tc>
+                  <a:txBody>
+                    <a:bodyPr/>
+                    <a:lstStyle/>
+                    <a:p>
+                      <a:pPr algn="ctr"/>
+                      <a:r>
+                        <a:rPr lang="en-IE" sz="2400" b="1" dirty="0"/>
+                        <a:t>3</a:t>
+                      </a:r>
+                    </a:p>
+                  </a:txBody>
+                  <a:tcPr/>
+                </a:tc>
+                <a:extLst>
+                  <a:ext uri="{0D108BD9-81ED-4DB2-BD59-A6C34878D82A}">
+                    <a16:rowId xmlns:a16="http://schemas.microsoft.com/office/drawing/2014/main" val="1821123948"/>
+                  </a:ext>
+                </a:extLst>
+              </a:tr>
+              <a:tr h="374610">
+                <a:tc>
+                  <a:txBody>
+                    <a:bodyPr/>
+                    <a:lstStyle/>
+                    <a:p>
+                      <a:pPr algn="ctr"/>
+                      <a:r>
+                        <a:rPr lang="en-IE" sz="2400" b="1" dirty="0">
+                          <a:solidFill>
+                            <a:srgbClr val="0070C0"/>
+                          </a:solidFill>
+                        </a:rPr>
+                        <a:t>1</a:t>
+                      </a:r>
+                    </a:p>
+                  </a:txBody>
+                  <a:tcPr/>
+                </a:tc>
+                <a:tc>
+                  <a:txBody>
+                    <a:bodyPr/>
+                    <a:lstStyle/>
+                    <a:p>
+                      <a:pPr algn="ctr"/>
+                      <a:r>
+                        <a:rPr lang="en-IE" sz="2400" b="1" dirty="0"/>
+                        <a:t>6</a:t>
+                      </a:r>
+                    </a:p>
+                  </a:txBody>
+                  <a:tcPr/>
+                </a:tc>
+                <a:extLst>
+                  <a:ext uri="{0D108BD9-81ED-4DB2-BD59-A6C34878D82A}">
+                    <a16:rowId xmlns:a16="http://schemas.microsoft.com/office/drawing/2014/main" val="4286675138"/>
+                  </a:ext>
+                </a:extLst>
+              </a:tr>
+              <a:tr h="374610">
+                <a:tc>
+                  <a:txBody>
+                    <a:bodyPr/>
+                    <a:lstStyle/>
+                    <a:p>
+                      <a:pPr algn="ctr"/>
+                      <a:r>
+                        <a:rPr lang="en-IE" sz="2400" b="1" dirty="0">
+                          <a:solidFill>
+                            <a:srgbClr val="0070C0"/>
+                          </a:solidFill>
+                        </a:rPr>
+                        <a:t>2</a:t>
+                      </a:r>
+                    </a:p>
+                  </a:txBody>
+                  <a:tcPr/>
+                </a:tc>
+                <a:tc>
+                  <a:txBody>
+                    <a:bodyPr/>
+                    <a:lstStyle/>
+                    <a:p>
+                      <a:pPr algn="ctr"/>
+                      <a:r>
+                        <a:rPr lang="en-IE" sz="2400" b="1" dirty="0"/>
+                        <a:t>56</a:t>
+                      </a:r>
+                    </a:p>
+                  </a:txBody>
+                  <a:tcPr/>
+                </a:tc>
+                <a:extLst>
+                  <a:ext uri="{0D108BD9-81ED-4DB2-BD59-A6C34878D82A}">
+                    <a16:rowId xmlns:a16="http://schemas.microsoft.com/office/drawing/2014/main" val="1375079718"/>
+                  </a:ext>
+                </a:extLst>
+              </a:tr>
+              <a:tr h="374610">
+                <a:tc>
+                  <a:txBody>
+                    <a:bodyPr/>
+                    <a:lstStyle/>
+                    <a:p>
+                      <a:pPr algn="ctr"/>
+                      <a:r>
+                        <a:rPr lang="en-IE" sz="2400" b="1" dirty="0">
+                          <a:solidFill>
+                            <a:srgbClr val="0070C0"/>
+                          </a:solidFill>
+                        </a:rPr>
+                        <a:t>3</a:t>
+                      </a:r>
+                    </a:p>
+                  </a:txBody>
+                  <a:tcPr/>
+                </a:tc>
+                <a:tc>
+                  <a:txBody>
+                    <a:bodyPr/>
+                    <a:lstStyle/>
+                    <a:p>
+                      <a:pPr algn="ctr"/>
+                      <a:r>
+                        <a:rPr lang="en-IE" sz="2400" b="1" dirty="0"/>
+                        <a:t>66</a:t>
+                      </a:r>
+                    </a:p>
+                  </a:txBody>
+                  <a:tcPr/>
+                </a:tc>
+                <a:extLst>
+                  <a:ext uri="{0D108BD9-81ED-4DB2-BD59-A6C34878D82A}">
+                    <a16:rowId xmlns:a16="http://schemas.microsoft.com/office/drawing/2014/main" val="365423453"/>
+                  </a:ext>
+                </a:extLst>
+              </a:tr>
+            </a:tbl>
+          </a:graphicData>
+        </a:graphic>
+      </p:graphicFrame>
+      <p:cxnSp>
+        <p:nvCxnSpPr>
+          <p:cNvPr id="6" name="Straight Arrow Connector 5">
+            <a:extLst>
+              <a:ext uri="{FF2B5EF4-FFF2-40B4-BE49-F238E27FC236}">
+                <a16:creationId xmlns:a16="http://schemas.microsoft.com/office/drawing/2014/main" id="{85D62459-8841-DE16-6DD0-929A2E1BBFDA}"/>
+              </a:ext>
+            </a:extLst>
+          </p:cNvPr>
+          <p:cNvCxnSpPr>
+            <a:endCxn id="9" idx="0"/>
+          </p:cNvCxnSpPr>
+          <p:nvPr/>
+        </p:nvCxnSpPr>
+        <p:spPr>
+          <a:xfrm>
+            <a:off x="8072865" y="2944951"/>
+            <a:ext cx="1185434" cy="1190694"/>
+          </a:xfrm>
+          <a:prstGeom prst="straightConnector1">
+            <a:avLst/>
+          </a:prstGeom>
+          <a:ln w="38100">
+            <a:tailEnd type="triangle"/>
+          </a:ln>
+        </p:spPr>
+        <p:style>
+          <a:lnRef idx="1">
+            <a:schemeClr val="accent1"/>
+          </a:lnRef>
+          <a:fillRef idx="0">
+            <a:schemeClr val="accent1"/>
+          </a:fillRef>
+          <a:effectRef idx="0">
+            <a:schemeClr val="accent1"/>
+          </a:effectRef>
+          <a:fontRef idx="minor">
+            <a:schemeClr val="tx1"/>
+          </a:fontRef>
+        </p:style>
+      </p:cxnSp>
+      <p:sp>
+        <p:nvSpPr>
+          <p:cNvPr id="10" name="Arrow: Down 9">
+            <a:extLst>
+              <a:ext uri="{FF2B5EF4-FFF2-40B4-BE49-F238E27FC236}">
+                <a16:creationId xmlns:a16="http://schemas.microsoft.com/office/drawing/2014/main" id="{EEFC8DC9-BF88-C704-B627-8DDBB5BF1E4E}"/>
+              </a:ext>
+            </a:extLst>
+          </p:cNvPr>
+          <p:cNvSpPr/>
+          <p:nvPr/>
+        </p:nvSpPr>
+        <p:spPr>
+          <a:xfrm>
+            <a:off x="990600" y="1656418"/>
+            <a:ext cx="5105400" cy="1828800"/>
+          </a:xfrm>
+          <a:prstGeom prst="downArrow">
+            <a:avLst/>
+          </a:prstGeom>
+        </p:spPr>
+        <p:style>
+          <a:lnRef idx="1">
+            <a:schemeClr val="accent4"/>
+          </a:lnRef>
+          <a:fillRef idx="2">
+            <a:schemeClr val="accent4"/>
+          </a:fillRef>
+          <a:effectRef idx="1">
+            <a:schemeClr val="accent4"/>
+          </a:effectRef>
+          <a:fontRef idx="minor">
+            <a:schemeClr val="dk1"/>
+          </a:fontRef>
+        </p:style>
+        <p:txBody>
+          <a:bodyPr rtlCol="0" anchor="ctr"/>
+          <a:lstStyle/>
+          <a:p>
+            <a:pPr algn="ctr"/>
+            <a:r>
+              <a:rPr lang="en-IE" sz="2800" dirty="0"/>
+              <a:t>We can also declare it like this…</a:t>
+            </a:r>
+          </a:p>
+        </p:txBody>
+      </p:sp>
+      <p:sp>
+        <p:nvSpPr>
+          <p:cNvPr id="11" name="Rectangle 10">
+            <a:extLst>
+              <a:ext uri="{FF2B5EF4-FFF2-40B4-BE49-F238E27FC236}">
+                <a16:creationId xmlns:a16="http://schemas.microsoft.com/office/drawing/2014/main" id="{4361DD91-574B-37CD-249D-0DA0B1048F0E}"/>
+              </a:ext>
+            </a:extLst>
+          </p:cNvPr>
+          <p:cNvSpPr/>
+          <p:nvPr/>
+        </p:nvSpPr>
+        <p:spPr>
+          <a:xfrm>
+            <a:off x="1333500" y="3495020"/>
+            <a:ext cx="4419600" cy="523220"/>
+          </a:xfrm>
+          <a:prstGeom prst="rect">
+            <a:avLst/>
+          </a:prstGeom>
+        </p:spPr>
+        <p:style>
+          <a:lnRef idx="1">
+            <a:schemeClr val="accent6"/>
+          </a:lnRef>
+          <a:fillRef idx="2">
+            <a:schemeClr val="accent6"/>
+          </a:fillRef>
+          <a:effectRef idx="1">
+            <a:schemeClr val="accent6"/>
+          </a:effectRef>
+          <a:fontRef idx="minor">
+            <a:schemeClr val="dk1"/>
+          </a:fontRef>
+        </p:style>
+        <p:txBody>
+          <a:bodyPr wrap="square">
+            <a:spAutoFit/>
+          </a:bodyPr>
+          <a:lstStyle/>
+          <a:p>
+            <a:r>
+              <a:rPr lang="en-GB" sz="2800" b="1" dirty="0">
+                <a:solidFill>
+                  <a:schemeClr val="tx1"/>
+                </a:solidFill>
+              </a:rPr>
+              <a:t>int[]  numbers = {3,6,56,66}</a:t>
+            </a:r>
+            <a:endParaRPr lang="en-IE" sz="2800" b="1" dirty="0">
+              <a:solidFill>
+                <a:schemeClr val="tx1"/>
+              </a:solidFill>
+            </a:endParaRPr>
+          </a:p>
+        </p:txBody>
+      </p:sp>
+      <p:sp>
+        <p:nvSpPr>
+          <p:cNvPr id="12" name="Donut 11">
+            <a:extLst>
+              <a:ext uri="{FF2B5EF4-FFF2-40B4-BE49-F238E27FC236}">
+                <a16:creationId xmlns:a16="http://schemas.microsoft.com/office/drawing/2014/main" id="{36B15477-2FB7-640A-1E1B-3EFF6D292E8C}"/>
+              </a:ext>
+            </a:extLst>
+          </p:cNvPr>
+          <p:cNvSpPr/>
+          <p:nvPr/>
+        </p:nvSpPr>
+        <p:spPr>
+          <a:xfrm>
+            <a:off x="990600" y="3223230"/>
+            <a:ext cx="5224670" cy="1066800"/>
+          </a:xfrm>
+          <a:prstGeom prst="donut">
+            <a:avLst>
+              <a:gd name="adj" fmla="val 2615"/>
+            </a:avLst>
+          </a:prstGeom>
+          <a:solidFill>
+            <a:srgbClr val="FF0000"/>
+          </a:solidFill>
+          <a:ln>
+            <a:solidFill>
+              <a:srgbClr val="FF0000"/>
+            </a:solidFill>
+          </a:ln>
+        </p:spPr>
+        <p:style>
+          <a:lnRef idx="2">
+            <a:schemeClr val="accent1">
+              <a:shade val="50000"/>
+            </a:schemeClr>
+          </a:lnRef>
+          <a:fillRef idx="1">
+            <a:schemeClr val="accent1"/>
+          </a:fillRef>
+          <a:effectRef idx="0">
+            <a:schemeClr val="accent1"/>
+          </a:effectRef>
+          <a:fontRef idx="minor">
+            <a:schemeClr val="lt1"/>
+          </a:fontRef>
+        </p:style>
+        <p:txBody>
+          <a:bodyPr rtlCol="0" anchor="ctr"/>
+          <a:lstStyle/>
+          <a:p>
+            <a:pPr algn="ctr"/>
+            <a:endParaRPr lang="en-GB">
+              <a:solidFill>
+                <a:schemeClr val="tx1"/>
+              </a:solidFill>
+            </a:endParaRPr>
+          </a:p>
+        </p:txBody>
+      </p:sp>
+      <p:sp>
+        <p:nvSpPr>
+          <p:cNvPr id="3" name="5-Point Star 2">
+            <a:extLst>
+              <a:ext uri="{FF2B5EF4-FFF2-40B4-BE49-F238E27FC236}">
+                <a16:creationId xmlns:a16="http://schemas.microsoft.com/office/drawing/2014/main" id="{1B2F2F98-9E68-585A-8A14-D8CA1D9F4992}"/>
+              </a:ext>
+            </a:extLst>
+          </p:cNvPr>
+          <p:cNvSpPr/>
+          <p:nvPr/>
+        </p:nvSpPr>
+        <p:spPr>
+          <a:xfrm>
+            <a:off x="6788938" y="5347662"/>
+            <a:ext cx="1138665" cy="1066800"/>
+          </a:xfrm>
+          <a:prstGeom prst="star5">
+            <a:avLst/>
+          </a:prstGeom>
+          <a:solidFill>
+            <a:srgbClr val="FF0000"/>
+          </a:solidFill>
+        </p:spPr>
+        <p:style>
+          <a:lnRef idx="2">
+            <a:schemeClr val="accent1">
+              <a:shade val="50000"/>
+            </a:schemeClr>
+          </a:lnRef>
+          <a:fillRef idx="1">
+            <a:schemeClr val="accent1"/>
+          </a:fillRef>
+          <a:effectRef idx="0">
+            <a:schemeClr val="accent1"/>
+          </a:effectRef>
+          <a:fontRef idx="minor">
+            <a:schemeClr val="lt1"/>
+          </a:fontRef>
+        </p:style>
+        <p:txBody>
+          <a:bodyPr rtlCol="0" anchor="ctr"/>
+          <a:lstStyle/>
+          <a:p>
+            <a:pPr algn="ctr"/>
+            <a:endParaRPr lang="en-GB"/>
+          </a:p>
+        </p:txBody>
+      </p:sp>
+    </p:spTree>
+    <p:extLst>
+      <p:ext uri="{BB962C8B-B14F-4D97-AF65-F5344CB8AC3E}">
+        <p14:creationId xmlns:p14="http://schemas.microsoft.com/office/powerpoint/2010/main" val="2066694862"/>
+      </p:ext>
+    </p:extLst>
+  </p:cSld>
+  <p:clrMapOvr>
+    <a:masterClrMapping/>
+  </p:clrMapOvr>
+  <p:timing>
+    <p:tnLst>
+      <p:par>
+        <p:cTn id="1" dur="indefinite" restart="never" nodeType="tmRoot">
+          <p:childTnLst>
+            <p:seq concurrent="1" nextAc="seek">
+              <p:cTn id="2" dur="indefinite" nodeType="mainSeq">
+                <p:childTnLst>
+                  <p:par>
+                    <p:cTn id="3" fill="hold">
+                      <p:stCondLst>
+                        <p:cond delay="indefinite"/>
+                        <p:cond evt="onBegin" delay="0">
+                          <p:tn val="2"/>
+                        </p:cond>
+                      </p:stCondLst>
+                      <p:childTnLst>
+                        <p:par>
+                          <p:cTn id="4" fill="hold">
+                            <p:stCondLst>
+                              <p:cond delay="0"/>
+                            </p:stCondLst>
+                            <p:childTnLst>
+                              <p:par>
+                                <p:cTn id="5" presetID="21" presetClass="entr" presetSubtype="1" fill="hold" grpId="0" nodeType="afterEffect">
+                                  <p:stCondLst>
+                                    <p:cond delay="0"/>
+                                  </p:stCondLst>
+                                  <p:childTnLst>
+                                    <p:set>
+                                      <p:cBhvr>
+                                        <p:cTn id="6" dur="1" fill="hold">
+                                          <p:stCondLst>
+                                            <p:cond delay="0"/>
+                                          </p:stCondLst>
+                                        </p:cTn>
+                                        <p:tgtEl>
+                                          <p:spTgt spid="12"/>
+                                        </p:tgtEl>
+                                        <p:attrNameLst>
+                                          <p:attrName>style.visibility</p:attrName>
+                                        </p:attrNameLst>
+                                      </p:cBhvr>
+                                      <p:to>
+                                        <p:strVal val="visible"/>
+                                      </p:to>
+                                    </p:set>
+                                    <p:animEffect transition="in" filter="wheel(1)">
+                                      <p:cBhvr>
+                                        <p:cTn id="7" dur="2000"/>
+                                        <p:tgtEl>
+                                          <p:spTgt spid="12"/>
+                                        </p:tgtEl>
+                                      </p:cBhvr>
+                                    </p:animEffect>
+                                  </p:childTnLst>
+                                </p:cTn>
+                              </p:par>
+                            </p:childTnLst>
+                          </p:cTn>
+                        </p:par>
+                      </p:childTnLst>
+                    </p:cTn>
+                  </p:par>
+                  <p:par>
+                    <p:cTn id="8" fill="hold">
+                      <p:stCondLst>
+                        <p:cond delay="indefinite"/>
+                      </p:stCondLst>
+                      <p:childTnLst>
+                        <p:par>
+                          <p:cTn id="9" fill="hold">
+                            <p:stCondLst>
+                              <p:cond delay="0"/>
+                            </p:stCondLst>
+                            <p:childTnLst>
+                              <p:par>
+                                <p:cTn id="10" presetID="2" presetClass="entr" presetSubtype="4" fill="hold" grpId="0" nodeType="clickEffect">
+                                  <p:stCondLst>
+                                    <p:cond delay="0"/>
+                                  </p:stCondLst>
+                                  <p:childTnLst>
+                                    <p:set>
+                                      <p:cBhvr>
+                                        <p:cTn id="11" dur="1" fill="hold">
+                                          <p:stCondLst>
+                                            <p:cond delay="0"/>
+                                          </p:stCondLst>
+                                        </p:cTn>
+                                        <p:tgtEl>
+                                          <p:spTgt spid="18"/>
+                                        </p:tgtEl>
+                                        <p:attrNameLst>
+                                          <p:attrName>style.visibility</p:attrName>
+                                        </p:attrNameLst>
+                                      </p:cBhvr>
+                                      <p:to>
+                                        <p:strVal val="visible"/>
+                                      </p:to>
+                                    </p:set>
+                                    <p:anim calcmode="lin" valueType="num">
+                                      <p:cBhvr additive="base">
+                                        <p:cTn id="12" dur="500" fill="hold"/>
+                                        <p:tgtEl>
+                                          <p:spTgt spid="18"/>
+                                        </p:tgtEl>
+                                        <p:attrNameLst>
+                                          <p:attrName>ppt_x</p:attrName>
+                                        </p:attrNameLst>
+                                      </p:cBhvr>
+                                      <p:tavLst>
+                                        <p:tav tm="0">
+                                          <p:val>
+                                            <p:strVal val="#ppt_x"/>
+                                          </p:val>
+                                        </p:tav>
+                                        <p:tav tm="100000">
+                                          <p:val>
+                                            <p:strVal val="#ppt_x"/>
+                                          </p:val>
+                                        </p:tav>
+                                      </p:tavLst>
+                                    </p:anim>
+                                    <p:anim calcmode="lin" valueType="num">
+                                      <p:cBhvr additive="base">
+                                        <p:cTn id="13" dur="500" fill="hold"/>
+                                        <p:tgtEl>
+                                          <p:spTgt spid="18"/>
+                                        </p:tgtEl>
+                                        <p:attrNameLst>
+                                          <p:attrName>ppt_y</p:attrName>
+                                        </p:attrNameLst>
+                                      </p:cBhvr>
+                                      <p:tavLst>
+                                        <p:tav tm="0">
+                                          <p:val>
+                                            <p:strVal val="1+#ppt_h/2"/>
+                                          </p:val>
+                                        </p:tav>
+                                        <p:tav tm="100000">
+                                          <p:val>
+                                            <p:strVal val="#ppt_y"/>
+                                          </p:val>
+                                        </p:tav>
+                                      </p:tavLst>
+                                    </p:anim>
+                                  </p:childTnLst>
+                                </p:cTn>
+                              </p:par>
+                              <p:par>
+                                <p:cTn id="14" presetID="2" presetClass="entr" presetSubtype="4" fill="hold" grpId="0" nodeType="withEffect">
+                                  <p:stCondLst>
+                                    <p:cond delay="0"/>
+                                  </p:stCondLst>
+                                  <p:childTnLst>
+                                    <p:set>
+                                      <p:cBhvr>
+                                        <p:cTn id="15" dur="1" fill="hold">
+                                          <p:stCondLst>
+                                            <p:cond delay="0"/>
+                                          </p:stCondLst>
+                                        </p:cTn>
+                                        <p:tgtEl>
+                                          <p:spTgt spid="17"/>
+                                        </p:tgtEl>
+                                        <p:attrNameLst>
+                                          <p:attrName>style.visibility</p:attrName>
+                                        </p:attrNameLst>
+                                      </p:cBhvr>
+                                      <p:to>
+                                        <p:strVal val="visible"/>
+                                      </p:to>
+                                    </p:set>
+                                    <p:anim calcmode="lin" valueType="num">
+                                      <p:cBhvr additive="base">
+                                        <p:cTn id="16" dur="500" fill="hold"/>
+                                        <p:tgtEl>
+                                          <p:spTgt spid="17"/>
+                                        </p:tgtEl>
+                                        <p:attrNameLst>
+                                          <p:attrName>ppt_x</p:attrName>
+                                        </p:attrNameLst>
+                                      </p:cBhvr>
+                                      <p:tavLst>
+                                        <p:tav tm="0">
+                                          <p:val>
+                                            <p:strVal val="#ppt_x"/>
+                                          </p:val>
+                                        </p:tav>
+                                        <p:tav tm="100000">
+                                          <p:val>
+                                            <p:strVal val="#ppt_x"/>
+                                          </p:val>
+                                        </p:tav>
+                                      </p:tavLst>
+                                    </p:anim>
+                                    <p:anim calcmode="lin" valueType="num">
+                                      <p:cBhvr additive="base">
+                                        <p:cTn id="17" dur="500" fill="hold"/>
+                                        <p:tgtEl>
+                                          <p:spTgt spid="17"/>
+                                        </p:tgtEl>
+                                        <p:attrNameLst>
+                                          <p:attrName>ppt_y</p:attrName>
+                                        </p:attrNameLst>
+                                      </p:cBhvr>
+                                      <p:tavLst>
+                                        <p:tav tm="0">
+                                          <p:val>
+                                            <p:strVal val="1+#ppt_h/2"/>
+                                          </p:val>
+                                        </p:tav>
+                                        <p:tav tm="100000">
+                                          <p:val>
+                                            <p:strVal val="#ppt_y"/>
+                                          </p:val>
+                                        </p:tav>
+                                      </p:tavLst>
+                                    </p:anim>
+                                  </p:childTnLst>
+                                </p:cTn>
+                              </p:par>
+                              <p:par>
+                                <p:cTn id="18" presetID="2" presetClass="entr" presetSubtype="4" fill="hold" nodeType="withEffect">
+                                  <p:stCondLst>
+                                    <p:cond delay="0"/>
+                                  </p:stCondLst>
+                                  <p:childTnLst>
+                                    <p:set>
+                                      <p:cBhvr>
+                                        <p:cTn id="19" dur="1" fill="hold">
+                                          <p:stCondLst>
+                                            <p:cond delay="0"/>
+                                          </p:stCondLst>
+                                        </p:cTn>
+                                        <p:tgtEl>
+                                          <p:spTgt spid="6"/>
+                                        </p:tgtEl>
+                                        <p:attrNameLst>
+                                          <p:attrName>style.visibility</p:attrName>
+                                        </p:attrNameLst>
+                                      </p:cBhvr>
+                                      <p:to>
+                                        <p:strVal val="visible"/>
+                                      </p:to>
+                                    </p:set>
+                                    <p:anim calcmode="lin" valueType="num">
+                                      <p:cBhvr additive="base">
+                                        <p:cTn id="20" dur="500" fill="hold"/>
+                                        <p:tgtEl>
+                                          <p:spTgt spid="6"/>
+                                        </p:tgtEl>
+                                        <p:attrNameLst>
+                                          <p:attrName>ppt_x</p:attrName>
+                                        </p:attrNameLst>
+                                      </p:cBhvr>
+                                      <p:tavLst>
+                                        <p:tav tm="0">
+                                          <p:val>
+                                            <p:strVal val="#ppt_x"/>
+                                          </p:val>
+                                        </p:tav>
+                                        <p:tav tm="100000">
+                                          <p:val>
+                                            <p:strVal val="#ppt_x"/>
+                                          </p:val>
+                                        </p:tav>
+                                      </p:tavLst>
+                                    </p:anim>
+                                    <p:anim calcmode="lin" valueType="num">
+                                      <p:cBhvr additive="base">
+                                        <p:cTn id="21" dur="500" fill="hold"/>
+                                        <p:tgtEl>
+                                          <p:spTgt spid="6"/>
+                                        </p:tgtEl>
+                                        <p:attrNameLst>
+                                          <p:attrName>ppt_y</p:attrName>
+                                        </p:attrNameLst>
+                                      </p:cBhvr>
+                                      <p:tavLst>
+                                        <p:tav tm="0">
+                                          <p:val>
+                                            <p:strVal val="1+#ppt_h/2"/>
+                                          </p:val>
+                                        </p:tav>
+                                        <p:tav tm="100000">
+                                          <p:val>
+                                            <p:strVal val="#ppt_y"/>
+                                          </p:val>
+                                        </p:tav>
+                                      </p:tavLst>
+                                    </p:anim>
+                                  </p:childTnLst>
+                                </p:cTn>
+                              </p:par>
+                            </p:childTnLst>
+                          </p:cTn>
+                        </p:par>
+                      </p:childTnLst>
+                    </p:cTn>
+                  </p:par>
+                  <p:par>
+                    <p:cTn id="22" fill="hold">
+                      <p:stCondLst>
+                        <p:cond delay="indefinite"/>
+                      </p:stCondLst>
+                      <p:childTnLst>
+                        <p:par>
+                          <p:cTn id="23" fill="hold">
+                            <p:stCondLst>
+                              <p:cond delay="0"/>
+                            </p:stCondLst>
+                            <p:childTnLst>
+                              <p:par>
+                                <p:cTn id="24" presetID="2" presetClass="entr" presetSubtype="4" fill="hold" nodeType="clickEffect">
+                                  <p:stCondLst>
+                                    <p:cond delay="0"/>
+                                  </p:stCondLst>
+                                  <p:childTnLst>
+                                    <p:set>
+                                      <p:cBhvr>
+                                        <p:cTn id="25" dur="1" fill="hold">
+                                          <p:stCondLst>
+                                            <p:cond delay="0"/>
+                                          </p:stCondLst>
+                                        </p:cTn>
+                                        <p:tgtEl>
+                                          <p:spTgt spid="9"/>
+                                        </p:tgtEl>
+                                        <p:attrNameLst>
+                                          <p:attrName>style.visibility</p:attrName>
+                                        </p:attrNameLst>
+                                      </p:cBhvr>
+                                      <p:to>
+                                        <p:strVal val="visible"/>
+                                      </p:to>
+                                    </p:set>
+                                    <p:anim calcmode="lin" valueType="num">
+                                      <p:cBhvr additive="base">
+                                        <p:cTn id="26" dur="500" fill="hold"/>
+                                        <p:tgtEl>
+                                          <p:spTgt spid="9"/>
+                                        </p:tgtEl>
+                                        <p:attrNameLst>
+                                          <p:attrName>ppt_x</p:attrName>
+                                        </p:attrNameLst>
+                                      </p:cBhvr>
+                                      <p:tavLst>
+                                        <p:tav tm="0">
+                                          <p:val>
+                                            <p:strVal val="#ppt_x"/>
+                                          </p:val>
+                                        </p:tav>
+                                        <p:tav tm="100000">
+                                          <p:val>
+                                            <p:strVal val="#ppt_x"/>
+                                          </p:val>
+                                        </p:tav>
+                                      </p:tavLst>
+                                    </p:anim>
+                                    <p:anim calcmode="lin" valueType="num">
+                                      <p:cBhvr additive="base">
+                                        <p:cTn id="27" dur="500" fill="hold"/>
+                                        <p:tgtEl>
+                                          <p:spTgt spid="9"/>
+                                        </p:tgtEl>
+                                        <p:attrNameLst>
+                                          <p:attrName>ppt_y</p:attrName>
+                                        </p:attrNameLst>
+                                      </p:cBhvr>
+                                      <p:tavLst>
+                                        <p:tav tm="0">
+                                          <p:val>
+                                            <p:strVal val="1+#ppt_h/2"/>
+                                          </p:val>
+                                        </p:tav>
+                                        <p:tav tm="100000">
+                                          <p:val>
+                                            <p:strVal val="#ppt_y"/>
+                                          </p:val>
+                                        </p:tav>
+                                      </p:tavLst>
+                                    </p:anim>
+                                  </p:childTnLst>
+                                </p:cTn>
+                              </p:par>
+                            </p:childTnLst>
+                          </p:cTn>
+                        </p:par>
+                      </p:childTnLst>
+                    </p:cTn>
+                  </p:par>
+                </p:childTnLst>
+              </p:cTn>
+              <p:prevCondLst>
+                <p:cond evt="onPrev" delay="0">
+                  <p:tgtEl>
+                    <p:sldTgt/>
+                  </p:tgtEl>
+                </p:cond>
+              </p:prevCondLst>
+              <p:nextCondLst>
+                <p:cond evt="onNext" delay="0">
+                  <p:tgtEl>
+                    <p:sldTgt/>
+                  </p:tgtEl>
+                </p:cond>
+              </p:nextCondLst>
+            </p:seq>
+          </p:childTnLst>
+        </p:cTn>
+      </p:par>
+    </p:tnLst>
+    <p:bldLst>
+      <p:bldP spid="17" grpId="0" animBg="1"/>
+      <p:bldP spid="18" grpId="0"/>
+      <p:bldP spid="12" grpId="0" animBg="1"/>
+    </p:bldLst>
+  </p:timing>
+</p:sld>
+</file>
+
+<file path=ppt/slides/slide26.xml><?xml version="1.0" encoding="utf-8"?>
+<p:sld xmlns:a="http://schemas.openxmlformats.org/drawingml/2006/main" xmlns:r="http://schemas.openxmlformats.org/officeDocument/2006/relationships" xmlns:p="http://schemas.openxmlformats.org/presentationml/2006/main">
+  <p:cSld>
+    <p:spTree>
+      <p:nvGrpSpPr>
         <p:cNvPr id="1" name=""/>
         <p:cNvGrpSpPr/>
         <p:nvPr/>
@@ -22176,7 +23927,7 @@
 </p:sld>
 </file>
 
-<file path=ppt/slides/slide26.xml><?xml version="1.0" encoding="utf-8"?>
+<file path=ppt/slides/slide27.xml><?xml version="1.0" encoding="utf-8"?>
 <p:sld xmlns:a="http://schemas.openxmlformats.org/drawingml/2006/main" xmlns:r="http://schemas.openxmlformats.org/officeDocument/2006/relationships" xmlns:p="http://schemas.openxmlformats.org/presentationml/2006/main">
   <p:cSld>
     <p:spTree>
@@ -22769,7 +24520,7 @@
 </p:sld>
 </file>
 
-<file path=ppt/slides/slide27.xml><?xml version="1.0" encoding="utf-8"?>
+<file path=ppt/slides/slide28.xml><?xml version="1.0" encoding="utf-8"?>
 <p:sld xmlns:a="http://schemas.openxmlformats.org/drawingml/2006/main" xmlns:r="http://schemas.openxmlformats.org/officeDocument/2006/relationships" xmlns:p="http://schemas.openxmlformats.org/presentationml/2006/main">
   <p:cSld>
     <p:spTree>
@@ -23099,7 +24850,7 @@
 </p:sld>
 </file>
 
-<file path=ppt/slides/slide28.xml><?xml version="1.0" encoding="utf-8"?>
+<file path=ppt/slides/slide29.xml><?xml version="1.0" encoding="utf-8"?>
 <p:sld xmlns:a="http://schemas.openxmlformats.org/drawingml/2006/main" xmlns:r="http://schemas.openxmlformats.org/officeDocument/2006/relationships" xmlns:p="http://schemas.openxmlformats.org/presentationml/2006/main">
   <p:cSld>
     <p:spTree>
@@ -24060,705 +25811,6 @@
       <p:bldP spid="11" grpId="0" animBg="1"/>
     </p:bldLst>
   </p:timing>
-</p:sld>
-</file>
-
-<file path=ppt/slides/slide29.xml><?xml version="1.0" encoding="utf-8"?>
-<p:sld xmlns:a="http://schemas.openxmlformats.org/drawingml/2006/main" xmlns:r="http://schemas.openxmlformats.org/officeDocument/2006/relationships" xmlns:p="http://schemas.openxmlformats.org/presentationml/2006/main">
-  <p:cSld>
-    <p:spTree>
-      <p:nvGrpSpPr>
-        <p:cNvPr id="1" name=""/>
-        <p:cNvGrpSpPr/>
-        <p:nvPr/>
-      </p:nvGrpSpPr>
-      <p:grpSpPr>
-        <a:xfrm>
-          <a:off x="0" y="0"/>
-          <a:ext cx="0" cy="0"/>
-          <a:chOff x="0" y="0"/>
-          <a:chExt cx="0" cy="0"/>
-        </a:xfrm>
-      </p:grpSpPr>
-      <p:sp>
-        <p:nvSpPr>
-          <p:cNvPr id="2" name="Title 1"/>
-          <p:cNvSpPr>
-            <a:spLocks noGrp="1"/>
-          </p:cNvSpPr>
-          <p:nvPr>
-            <p:ph type="title"/>
-          </p:nvPr>
-        </p:nvSpPr>
-        <p:spPr/>
-        <p:txBody>
-          <a:bodyPr/>
-          <a:lstStyle/>
-          <a:p>
-            <a:pPr algn="ctr"/>
-            <a:r>
-              <a:rPr lang="en-IE" dirty="0"/>
-              <a:t>Using arrays to remember numbers</a:t>
-            </a:r>
-          </a:p>
-        </p:txBody>
-      </p:sp>
-      <p:sp>
-        <p:nvSpPr>
-          <p:cNvPr id="11" name="TextBox 10"/>
-          <p:cNvSpPr txBox="1"/>
-          <p:nvPr/>
-        </p:nvSpPr>
-        <p:spPr>
-          <a:xfrm>
-            <a:off x="1952625" y="1295401"/>
-            <a:ext cx="8410575" cy="5632311"/>
-          </a:xfrm>
-          <a:prstGeom prst="rect">
-            <a:avLst/>
-          </a:prstGeom>
-          <a:ln/>
-        </p:spPr>
-        <p:style>
-          <a:lnRef idx="1">
-            <a:schemeClr val="accent5"/>
-          </a:lnRef>
-          <a:fillRef idx="2">
-            <a:schemeClr val="accent5"/>
-          </a:fillRef>
-          <a:effectRef idx="1">
-            <a:schemeClr val="accent5"/>
-          </a:effectRef>
-          <a:fontRef idx="minor">
-            <a:schemeClr val="dk1"/>
-          </a:fontRef>
-        </p:style>
-        <p:txBody>
-          <a:bodyPr wrap="square" rtlCol="0">
-            <a:spAutoFit/>
-          </a:bodyPr>
-          <a:lstStyle/>
-          <a:p>
-            <a:r>
-              <a:rPr lang="en-IE" sz="2000" b="1" dirty="0">
-                <a:solidFill>
-                  <a:srgbClr val="000080"/>
-                </a:solidFill>
-                <a:effectLst/>
-              </a:rPr>
-              <a:t>import </a:t>
-            </a:r>
-            <a:r>
-              <a:rPr lang="en-IE" sz="2000" dirty="0" err="1"/>
-              <a:t>java.util.Scanner</a:t>
-            </a:r>
-            <a:r>
-              <a:rPr lang="en-IE" sz="2000" dirty="0"/>
-              <a:t>;</a:t>
-            </a:r>
-            <a:br>
-              <a:rPr lang="en-IE" sz="2000" dirty="0"/>
-            </a:br>
-            <a:r>
-              <a:rPr lang="en-IE" sz="2000" dirty="0"/>
-              <a:t> :</a:t>
-            </a:r>
-          </a:p>
-          <a:p>
-            <a:r>
-              <a:rPr lang="en-IE" sz="2000" dirty="0"/>
-              <a:t>Scanner </a:t>
-            </a:r>
-            <a:r>
-              <a:rPr lang="en-IE" sz="2000" i="1" dirty="0">
-                <a:solidFill>
-                  <a:srgbClr val="660E7A"/>
-                </a:solidFill>
-                <a:effectLst/>
-              </a:rPr>
-              <a:t>input </a:t>
-            </a:r>
-            <a:r>
-              <a:rPr lang="en-IE" sz="2000" dirty="0"/>
-              <a:t>= </a:t>
-            </a:r>
-            <a:r>
-              <a:rPr lang="en-IE" sz="2000" b="1" dirty="0">
-                <a:solidFill>
-                  <a:srgbClr val="000080"/>
-                </a:solidFill>
-                <a:effectLst/>
-              </a:rPr>
-              <a:t>new </a:t>
-            </a:r>
-            <a:r>
-              <a:rPr lang="en-IE" sz="2000" dirty="0"/>
-              <a:t>Scanner(</a:t>
-            </a:r>
-            <a:r>
-              <a:rPr lang="en-IE" sz="2000" dirty="0" err="1"/>
-              <a:t>System.</a:t>
-            </a:r>
-            <a:r>
-              <a:rPr lang="en-IE" sz="2000" b="1" i="1" dirty="0" err="1">
-                <a:solidFill>
-                  <a:srgbClr val="660E7A"/>
-                </a:solidFill>
-                <a:effectLst/>
-              </a:rPr>
-              <a:t>in</a:t>
-            </a:r>
-            <a:r>
-              <a:rPr lang="en-IE" sz="2000" dirty="0"/>
-              <a:t>);</a:t>
-            </a:r>
-          </a:p>
-          <a:p>
-            <a:r>
-              <a:rPr lang="en-IE" sz="2000" dirty="0"/>
-              <a:t> :</a:t>
-            </a:r>
-            <a:endParaRPr lang="en-US" sz="2000" dirty="0">
-              <a:latin typeface="Arial" panose="020B0604020202020204" pitchFamily="34" charset="0"/>
-              <a:cs typeface="Arial" panose="020B0604020202020204" pitchFamily="34" charset="0"/>
-            </a:endParaRPr>
-          </a:p>
-          <a:p>
-            <a:r>
-              <a:rPr lang="en-US" sz="2000" b="1" dirty="0" err="1">
-                <a:latin typeface="Arial" panose="020B0604020202020204" pitchFamily="34" charset="0"/>
-                <a:cs typeface="Arial" panose="020B0604020202020204" pitchFamily="34" charset="0"/>
-              </a:rPr>
-              <a:t>int</a:t>
-            </a:r>
-            <a:r>
-              <a:rPr lang="en-US" sz="2000" b="1" dirty="0">
-                <a:latin typeface="Arial" panose="020B0604020202020204" pitchFamily="34" charset="0"/>
-                <a:cs typeface="Arial" panose="020B0604020202020204" pitchFamily="34" charset="0"/>
-              </a:rPr>
-              <a:t> numbers[] = new </a:t>
-            </a:r>
-            <a:r>
-              <a:rPr lang="en-US" sz="2000" b="1" dirty="0" err="1">
-                <a:latin typeface="Arial" panose="020B0604020202020204" pitchFamily="34" charset="0"/>
-                <a:cs typeface="Arial" panose="020B0604020202020204" pitchFamily="34" charset="0"/>
-              </a:rPr>
-              <a:t>int</a:t>
-            </a:r>
-            <a:r>
-              <a:rPr lang="en-US" sz="2000" b="1" dirty="0">
-                <a:latin typeface="Arial" panose="020B0604020202020204" pitchFamily="34" charset="0"/>
-                <a:cs typeface="Arial" panose="020B0604020202020204" pitchFamily="34" charset="0"/>
-              </a:rPr>
-              <a:t>[10];           </a:t>
-            </a:r>
-          </a:p>
-          <a:p>
-            <a:r>
-              <a:rPr lang="en-US" sz="2000" dirty="0" err="1">
-                <a:latin typeface="Arial" panose="020B0604020202020204" pitchFamily="34" charset="0"/>
-                <a:cs typeface="Arial" panose="020B0604020202020204" pitchFamily="34" charset="0"/>
-              </a:rPr>
-              <a:t>int</a:t>
-            </a:r>
-            <a:r>
-              <a:rPr lang="en-US" sz="2000" dirty="0">
-                <a:latin typeface="Arial" panose="020B0604020202020204" pitchFamily="34" charset="0"/>
-                <a:cs typeface="Arial" panose="020B0604020202020204" pitchFamily="34" charset="0"/>
-              </a:rPr>
-              <a:t> sum = 0;</a:t>
-            </a:r>
-          </a:p>
-          <a:p>
-            <a:endParaRPr lang="en-US" sz="2000" dirty="0">
-              <a:latin typeface="Arial" panose="020B0604020202020204" pitchFamily="34" charset="0"/>
-              <a:cs typeface="Arial" panose="020B0604020202020204" pitchFamily="34" charset="0"/>
-            </a:endParaRPr>
-          </a:p>
-          <a:p>
-            <a:r>
-              <a:rPr lang="en-US" sz="2000" dirty="0">
-                <a:solidFill>
-                  <a:srgbClr val="0070C0"/>
-                </a:solidFill>
-                <a:latin typeface="Arial" panose="020B0604020202020204" pitchFamily="34" charset="0"/>
-                <a:cs typeface="Arial" panose="020B0604020202020204" pitchFamily="34" charset="0"/>
-              </a:rPr>
-              <a:t>//read in the data</a:t>
-            </a:r>
-          </a:p>
-          <a:p>
-            <a:r>
-              <a:rPr lang="en-US" sz="2000" dirty="0">
-                <a:latin typeface="Arial" panose="020B0604020202020204" pitchFamily="34" charset="0"/>
-                <a:cs typeface="Arial" panose="020B0604020202020204" pitchFamily="34" charset="0"/>
-              </a:rPr>
-              <a:t>for (</a:t>
-            </a:r>
-            <a:r>
-              <a:rPr lang="en-US" sz="2000" dirty="0" err="1">
-                <a:latin typeface="Arial" panose="020B0604020202020204" pitchFamily="34" charset="0"/>
-                <a:cs typeface="Arial" panose="020B0604020202020204" pitchFamily="34" charset="0"/>
-              </a:rPr>
-              <a:t>int</a:t>
-            </a:r>
-            <a:r>
-              <a:rPr lang="en-US" sz="2000" dirty="0">
-                <a:latin typeface="Arial" panose="020B0604020202020204" pitchFamily="34" charset="0"/>
-                <a:cs typeface="Arial" panose="020B0604020202020204" pitchFamily="34" charset="0"/>
-              </a:rPr>
-              <a:t> </a:t>
-            </a:r>
-            <a:r>
-              <a:rPr lang="en-US" sz="2000" dirty="0" err="1">
-                <a:latin typeface="Arial" panose="020B0604020202020204" pitchFamily="34" charset="0"/>
-                <a:cs typeface="Arial" panose="020B0604020202020204" pitchFamily="34" charset="0"/>
-              </a:rPr>
-              <a:t>i</a:t>
-            </a:r>
-            <a:r>
-              <a:rPr lang="en-US" sz="2000" dirty="0">
-                <a:latin typeface="Arial" panose="020B0604020202020204" pitchFamily="34" charset="0"/>
-                <a:cs typeface="Arial" panose="020B0604020202020204" pitchFamily="34" charset="0"/>
-              </a:rPr>
-              <a:t> = 0; </a:t>
-            </a:r>
-            <a:r>
-              <a:rPr lang="en-US" sz="2000" dirty="0" err="1">
-                <a:latin typeface="Arial" panose="020B0604020202020204" pitchFamily="34" charset="0"/>
-                <a:cs typeface="Arial" panose="020B0604020202020204" pitchFamily="34" charset="0"/>
-              </a:rPr>
-              <a:t>i</a:t>
-            </a:r>
-            <a:r>
-              <a:rPr lang="en-US" sz="2000" dirty="0">
-                <a:latin typeface="Arial" panose="020B0604020202020204" pitchFamily="34" charset="0"/>
-                <a:cs typeface="Arial" panose="020B0604020202020204" pitchFamily="34" charset="0"/>
-              </a:rPr>
-              <a:t> &lt; 10 ; </a:t>
-            </a:r>
-            <a:r>
-              <a:rPr lang="en-US" sz="2000" dirty="0" err="1">
-                <a:latin typeface="Arial" panose="020B0604020202020204" pitchFamily="34" charset="0"/>
-                <a:cs typeface="Arial" panose="020B0604020202020204" pitchFamily="34" charset="0"/>
-              </a:rPr>
-              <a:t>i</a:t>
-            </a:r>
-            <a:r>
-              <a:rPr lang="en-US" sz="2000" dirty="0">
-                <a:latin typeface="Arial" panose="020B0604020202020204" pitchFamily="34" charset="0"/>
-                <a:cs typeface="Arial" panose="020B0604020202020204" pitchFamily="34" charset="0"/>
-              </a:rPr>
-              <a:t> ++)  {    </a:t>
-            </a:r>
-          </a:p>
-          <a:p>
-            <a:r>
-              <a:rPr lang="en-US" sz="2000" dirty="0">
-                <a:latin typeface="Arial" panose="020B0604020202020204" pitchFamily="34" charset="0"/>
-                <a:cs typeface="Arial" panose="020B0604020202020204" pitchFamily="34" charset="0"/>
-              </a:rPr>
-              <a:t>        </a:t>
-            </a:r>
-            <a:r>
-              <a:rPr lang="en-US" sz="2000" b="1" dirty="0">
-                <a:latin typeface="Arial" panose="020B0604020202020204" pitchFamily="34" charset="0"/>
-                <a:cs typeface="Arial" panose="020B0604020202020204" pitchFamily="34" charset="0"/>
-              </a:rPr>
-              <a:t>numbers[</a:t>
-            </a:r>
-            <a:r>
-              <a:rPr lang="en-US" sz="2000" b="1" dirty="0" err="1">
-                <a:latin typeface="Arial" panose="020B0604020202020204" pitchFamily="34" charset="0"/>
-                <a:cs typeface="Arial" panose="020B0604020202020204" pitchFamily="34" charset="0"/>
-              </a:rPr>
-              <a:t>i</a:t>
-            </a:r>
-            <a:r>
-              <a:rPr lang="en-US" sz="2000" b="1" dirty="0">
-                <a:latin typeface="Arial" panose="020B0604020202020204" pitchFamily="34" charset="0"/>
-                <a:cs typeface="Arial" panose="020B0604020202020204" pitchFamily="34" charset="0"/>
-              </a:rPr>
-              <a:t>] </a:t>
-            </a:r>
-            <a:r>
-              <a:rPr lang="en-US" sz="2000" dirty="0">
-                <a:latin typeface="Arial" panose="020B0604020202020204" pitchFamily="34" charset="0"/>
-                <a:cs typeface="Arial" panose="020B0604020202020204" pitchFamily="34" charset="0"/>
-              </a:rPr>
-              <a:t>= </a:t>
-            </a:r>
-            <a:r>
-              <a:rPr lang="en-US" sz="2000" dirty="0" err="1">
-                <a:latin typeface="Arial" panose="020B0604020202020204" pitchFamily="34" charset="0"/>
-                <a:cs typeface="Arial" panose="020B0604020202020204" pitchFamily="34" charset="0"/>
-              </a:rPr>
-              <a:t>input.readInt();</a:t>
-            </a:r>
-            <a:endParaRPr lang="en-US" sz="2000" dirty="0">
-              <a:latin typeface="Arial" panose="020B0604020202020204" pitchFamily="34" charset="0"/>
-              <a:cs typeface="Arial" panose="020B0604020202020204" pitchFamily="34" charset="0"/>
-            </a:endParaRPr>
-          </a:p>
-          <a:p>
-            <a:r>
-              <a:rPr lang="en-US" sz="2000" dirty="0">
-                <a:latin typeface="Arial" panose="020B0604020202020204" pitchFamily="34" charset="0"/>
-                <a:cs typeface="Arial" panose="020B0604020202020204" pitchFamily="34" charset="0"/>
-              </a:rPr>
-              <a:t>}      </a:t>
-            </a:r>
-          </a:p>
-          <a:p>
-            <a:endParaRPr lang="en-US" sz="2000" dirty="0">
-              <a:latin typeface="Arial" panose="020B0604020202020204" pitchFamily="34" charset="0"/>
-              <a:cs typeface="Arial" panose="020B0604020202020204" pitchFamily="34" charset="0"/>
-            </a:endParaRPr>
-          </a:p>
-          <a:p>
-            <a:r>
-              <a:rPr lang="en-US" sz="2000" dirty="0">
-                <a:solidFill>
-                  <a:srgbClr val="0070C0"/>
-                </a:solidFill>
-                <a:latin typeface="Arial" panose="020B0604020202020204" pitchFamily="34" charset="0"/>
-                <a:cs typeface="Arial" panose="020B0604020202020204" pitchFamily="34" charset="0"/>
-              </a:rPr>
-              <a:t>// now we sum the values</a:t>
-            </a:r>
-          </a:p>
-          <a:p>
-            <a:r>
-              <a:rPr lang="en-US" sz="2000" dirty="0">
-                <a:latin typeface="Arial" panose="020B0604020202020204" pitchFamily="34" charset="0"/>
-                <a:cs typeface="Arial" panose="020B0604020202020204" pitchFamily="34" charset="0"/>
-              </a:rPr>
-              <a:t>for (</a:t>
-            </a:r>
-            <a:r>
-              <a:rPr lang="en-US" sz="2000" dirty="0" err="1">
-                <a:latin typeface="Arial" panose="020B0604020202020204" pitchFamily="34" charset="0"/>
-                <a:cs typeface="Arial" panose="020B0604020202020204" pitchFamily="34" charset="0"/>
-              </a:rPr>
-              <a:t>int</a:t>
-            </a:r>
-            <a:r>
-              <a:rPr lang="en-US" sz="2000" dirty="0">
-                <a:latin typeface="Arial" panose="020B0604020202020204" pitchFamily="34" charset="0"/>
-                <a:cs typeface="Arial" panose="020B0604020202020204" pitchFamily="34" charset="0"/>
-              </a:rPr>
-              <a:t> </a:t>
-            </a:r>
-            <a:r>
-              <a:rPr lang="en-US" sz="2000" dirty="0" err="1">
-                <a:latin typeface="Arial" panose="020B0604020202020204" pitchFamily="34" charset="0"/>
-                <a:cs typeface="Arial" panose="020B0604020202020204" pitchFamily="34" charset="0"/>
-              </a:rPr>
-              <a:t>i</a:t>
-            </a:r>
-            <a:r>
-              <a:rPr lang="en-US" sz="2000" dirty="0">
-                <a:latin typeface="Arial" panose="020B0604020202020204" pitchFamily="34" charset="0"/>
-                <a:cs typeface="Arial" panose="020B0604020202020204" pitchFamily="34" charset="0"/>
-              </a:rPr>
-              <a:t> = 0; </a:t>
-            </a:r>
-            <a:r>
-              <a:rPr lang="en-US" sz="2000" dirty="0" err="1">
-                <a:latin typeface="Arial" panose="020B0604020202020204" pitchFamily="34" charset="0"/>
-                <a:cs typeface="Arial" panose="020B0604020202020204" pitchFamily="34" charset="0"/>
-              </a:rPr>
-              <a:t>i</a:t>
-            </a:r>
-            <a:r>
-              <a:rPr lang="en-US" sz="2000" dirty="0">
-                <a:latin typeface="Arial" panose="020B0604020202020204" pitchFamily="34" charset="0"/>
-                <a:cs typeface="Arial" panose="020B0604020202020204" pitchFamily="34" charset="0"/>
-              </a:rPr>
-              <a:t> &lt; 10 ; </a:t>
-            </a:r>
-            <a:r>
-              <a:rPr lang="en-US" sz="2000" dirty="0" err="1">
-                <a:latin typeface="Arial" panose="020B0604020202020204" pitchFamily="34" charset="0"/>
-                <a:cs typeface="Arial" panose="020B0604020202020204" pitchFamily="34" charset="0"/>
-              </a:rPr>
-              <a:t>i</a:t>
-            </a:r>
-            <a:r>
-              <a:rPr lang="en-US" sz="2000" dirty="0">
-                <a:latin typeface="Arial" panose="020B0604020202020204" pitchFamily="34" charset="0"/>
-                <a:cs typeface="Arial" panose="020B0604020202020204" pitchFamily="34" charset="0"/>
-              </a:rPr>
-              <a:t> ++)   {   </a:t>
-            </a:r>
-          </a:p>
-          <a:p>
-            <a:r>
-              <a:rPr lang="en-US" sz="2000" dirty="0">
-                <a:latin typeface="Arial" panose="020B0604020202020204" pitchFamily="34" charset="0"/>
-                <a:cs typeface="Arial" panose="020B0604020202020204" pitchFamily="34" charset="0"/>
-              </a:rPr>
-              <a:t>        </a:t>
-            </a:r>
-            <a:r>
-              <a:rPr lang="en-US" sz="2000" b="1" dirty="0">
-                <a:latin typeface="Arial" panose="020B0604020202020204" pitchFamily="34" charset="0"/>
-                <a:cs typeface="Arial" panose="020B0604020202020204" pitchFamily="34" charset="0"/>
-              </a:rPr>
-              <a:t>sum += numbers[</a:t>
-            </a:r>
-            <a:r>
-              <a:rPr lang="en-US" sz="2000" b="1" dirty="0" err="1">
-                <a:latin typeface="Arial" panose="020B0604020202020204" pitchFamily="34" charset="0"/>
-                <a:cs typeface="Arial" panose="020B0604020202020204" pitchFamily="34" charset="0"/>
-              </a:rPr>
-              <a:t>i</a:t>
-            </a:r>
-            <a:r>
-              <a:rPr lang="en-US" sz="2000" b="1" dirty="0">
-                <a:latin typeface="Arial" panose="020B0604020202020204" pitchFamily="34" charset="0"/>
-                <a:cs typeface="Arial" panose="020B0604020202020204" pitchFamily="34" charset="0"/>
-              </a:rPr>
-              <a:t>];  </a:t>
-            </a:r>
-          </a:p>
-          <a:p>
-            <a:r>
-              <a:rPr lang="en-US" sz="2000" dirty="0">
-                <a:latin typeface="Arial" panose="020B0604020202020204" pitchFamily="34" charset="0"/>
-                <a:cs typeface="Arial" panose="020B0604020202020204" pitchFamily="34" charset="0"/>
-              </a:rPr>
-              <a:t>} </a:t>
-            </a:r>
-          </a:p>
-          <a:p>
-            <a:endParaRPr lang="en-US" sz="2000" dirty="0">
-              <a:latin typeface="Arial" panose="020B0604020202020204" pitchFamily="34" charset="0"/>
-              <a:cs typeface="Arial" panose="020B0604020202020204" pitchFamily="34" charset="0"/>
-            </a:endParaRPr>
-          </a:p>
-          <a:p>
-            <a:r>
-              <a:rPr lang="en-US" sz="2000" dirty="0" err="1">
-                <a:latin typeface="Arial" panose="020B0604020202020204" pitchFamily="34" charset="0"/>
-                <a:cs typeface="Arial" panose="020B0604020202020204" pitchFamily="34" charset="0"/>
-              </a:rPr>
-              <a:t>System.out.println</a:t>
-            </a:r>
-            <a:r>
-              <a:rPr lang="en-US" sz="2000" dirty="0">
-                <a:latin typeface="Arial" panose="020B0604020202020204" pitchFamily="34" charset="0"/>
-                <a:cs typeface="Arial" panose="020B0604020202020204" pitchFamily="34" charset="0"/>
-              </a:rPr>
-              <a:t>("The sum of the values you typed in is : " + sum);</a:t>
-            </a:r>
-          </a:p>
-        </p:txBody>
-      </p:sp>
-      <p:sp>
-        <p:nvSpPr>
-          <p:cNvPr id="6" name="Rectangle 5">
-            <a:extLst>
-              <a:ext uri="{FF2B5EF4-FFF2-40B4-BE49-F238E27FC236}">
-                <a16:creationId xmlns:a16="http://schemas.microsoft.com/office/drawing/2014/main" id="{77611231-9EA1-43F6-BEDB-9B8EBF6CCC47}"/>
-              </a:ext>
-            </a:extLst>
-          </p:cNvPr>
-          <p:cNvSpPr/>
-          <p:nvPr/>
-        </p:nvSpPr>
-        <p:spPr>
-          <a:xfrm>
-            <a:off x="6625652" y="6444862"/>
-            <a:ext cx="5562600" cy="276999"/>
-          </a:xfrm>
-          <a:prstGeom prst="rect">
-            <a:avLst/>
-          </a:prstGeom>
-        </p:spPr>
-        <p:txBody>
-          <a:bodyPr wrap="square">
-            <a:spAutoFit/>
-          </a:bodyPr>
-          <a:lstStyle/>
-          <a:p>
-            <a:pPr algn="r"/>
-            <a:r>
-              <a:rPr lang="en-IE" sz="1200" dirty="0"/>
-              <a:t>Source:  </a:t>
-            </a:r>
-            <a:r>
-              <a:rPr lang="en-IE" sz="1200" dirty="0" err="1"/>
-              <a:t>Reas</a:t>
-            </a:r>
-            <a:r>
-              <a:rPr lang="en-IE" sz="1200" dirty="0"/>
-              <a:t> &amp; Fry (2014)</a:t>
-            </a:r>
-          </a:p>
-        </p:txBody>
-      </p:sp>
-      <p:sp>
-        <p:nvSpPr>
-          <p:cNvPr id="7" name="TextBox 6">
-            <a:extLst>
-              <a:ext uri="{FF2B5EF4-FFF2-40B4-BE49-F238E27FC236}">
-                <a16:creationId xmlns:a16="http://schemas.microsoft.com/office/drawing/2014/main" id="{394ECE76-B38B-4C6A-B487-C423E55B0B91}"/>
-              </a:ext>
-            </a:extLst>
-          </p:cNvPr>
-          <p:cNvSpPr txBox="1"/>
-          <p:nvPr/>
-        </p:nvSpPr>
-        <p:spPr>
-          <a:xfrm>
-            <a:off x="6324602" y="1178660"/>
-            <a:ext cx="4190998" cy="2246769"/>
-          </a:xfrm>
-          <a:prstGeom prst="rect">
-            <a:avLst/>
-          </a:prstGeom>
-          <a:ln/>
-        </p:spPr>
-        <p:style>
-          <a:lnRef idx="1">
-            <a:schemeClr val="accent4"/>
-          </a:lnRef>
-          <a:fillRef idx="2">
-            <a:schemeClr val="accent4"/>
-          </a:fillRef>
-          <a:effectRef idx="1">
-            <a:schemeClr val="accent4"/>
-          </a:effectRef>
-          <a:fontRef idx="minor">
-            <a:schemeClr val="dk1"/>
-          </a:fontRef>
-        </p:style>
-        <p:txBody>
-          <a:bodyPr wrap="square" rtlCol="0">
-            <a:spAutoFit/>
-          </a:bodyPr>
-          <a:lstStyle/>
-          <a:p>
-            <a:pPr algn="ctr"/>
-            <a:r>
-              <a:rPr lang="en-US" sz="2800" b="1" dirty="0">
-                <a:solidFill>
-                  <a:srgbClr val="FF0000"/>
-                </a:solidFill>
-              </a:rPr>
-              <a:t>Q: </a:t>
-            </a:r>
-            <a:r>
-              <a:rPr lang="en-US" sz="2800" dirty="0"/>
-              <a:t>Can we reduce the code to only have </a:t>
-            </a:r>
-            <a:r>
-              <a:rPr lang="en-US" sz="2800" b="1" dirty="0"/>
-              <a:t>one loop?</a:t>
-            </a:r>
-          </a:p>
-          <a:p>
-            <a:pPr algn="ctr"/>
-            <a:endParaRPr lang="en-US" sz="2800" b="1" dirty="0"/>
-          </a:p>
-          <a:p>
-            <a:pPr algn="ctr"/>
-            <a:r>
-              <a:rPr lang="en-US" sz="2800" dirty="0"/>
-              <a:t>Could we move the “sum” code into the first loop?</a:t>
-            </a:r>
-            <a:endParaRPr lang="en-US" sz="2800" dirty="0">
-              <a:solidFill>
-                <a:schemeClr val="tx1"/>
-              </a:solidFill>
-            </a:endParaRPr>
-          </a:p>
-        </p:txBody>
-      </p:sp>
-      <p:sp>
-        <p:nvSpPr>
-          <p:cNvPr id="3" name="TextBox 2"/>
-          <p:cNvSpPr txBox="1"/>
-          <p:nvPr/>
-        </p:nvSpPr>
-        <p:spPr>
-          <a:xfrm>
-            <a:off x="4317365" y="2858870"/>
-            <a:ext cx="817853" cy="646331"/>
-          </a:xfrm>
-          <a:prstGeom prst="rect">
-            <a:avLst/>
-          </a:prstGeom>
-          <a:noFill/>
-        </p:spPr>
-        <p:txBody>
-          <a:bodyPr wrap="none" rtlCol="0">
-            <a:spAutoFit/>
-          </a:bodyPr>
-          <a:lstStyle/>
-          <a:p>
-            <a:r>
-              <a:rPr lang="en-GB" b="1" dirty="0">
-                <a:solidFill>
-                  <a:srgbClr val="FF0000"/>
-                </a:solidFill>
-              </a:rPr>
-              <a:t>Loop 1</a:t>
-            </a:r>
-          </a:p>
-          <a:p>
-            <a:endParaRPr lang="en-GB" dirty="0">
-              <a:solidFill>
-                <a:srgbClr val="FF0000"/>
-              </a:solidFill>
-            </a:endParaRPr>
-          </a:p>
-        </p:txBody>
-      </p:sp>
-      <p:sp>
-        <p:nvSpPr>
-          <p:cNvPr id="4" name="TextBox 3"/>
-          <p:cNvSpPr txBox="1"/>
-          <p:nvPr/>
-        </p:nvSpPr>
-        <p:spPr>
-          <a:xfrm>
-            <a:off x="4953001" y="4673768"/>
-            <a:ext cx="817853" cy="369332"/>
-          </a:xfrm>
-          <a:prstGeom prst="rect">
-            <a:avLst/>
-          </a:prstGeom>
-          <a:noFill/>
-        </p:spPr>
-        <p:txBody>
-          <a:bodyPr wrap="none" rtlCol="0">
-            <a:spAutoFit/>
-          </a:bodyPr>
-          <a:lstStyle/>
-          <a:p>
-            <a:r>
-              <a:rPr lang="en-GB" b="1" dirty="0">
-                <a:solidFill>
-                  <a:srgbClr val="FF0000"/>
-                </a:solidFill>
-              </a:rPr>
-              <a:t>Loop 2</a:t>
-            </a:r>
-          </a:p>
-        </p:txBody>
-      </p:sp>
-    </p:spTree>
-    <p:extLst>
-      <p:ext uri="{BB962C8B-B14F-4D97-AF65-F5344CB8AC3E}">
-        <p14:creationId xmlns:p14="http://schemas.microsoft.com/office/powerpoint/2010/main" val="316799238"/>
-      </p:ext>
-    </p:extLst>
-  </p:cSld>
-  <p:clrMapOvr>
-    <a:masterClrMapping/>
-  </p:clrMapOvr>
 </p:sld>
 </file>
 
@@ -25190,6 +26242,705 @@
         </p:nvSpPr>
         <p:spPr>
           <a:xfrm>
+            <a:off x="1952625" y="1295401"/>
+            <a:ext cx="8410575" cy="5632311"/>
+          </a:xfrm>
+          <a:prstGeom prst="rect">
+            <a:avLst/>
+          </a:prstGeom>
+          <a:ln/>
+        </p:spPr>
+        <p:style>
+          <a:lnRef idx="1">
+            <a:schemeClr val="accent5"/>
+          </a:lnRef>
+          <a:fillRef idx="2">
+            <a:schemeClr val="accent5"/>
+          </a:fillRef>
+          <a:effectRef idx="1">
+            <a:schemeClr val="accent5"/>
+          </a:effectRef>
+          <a:fontRef idx="minor">
+            <a:schemeClr val="dk1"/>
+          </a:fontRef>
+        </p:style>
+        <p:txBody>
+          <a:bodyPr wrap="square" rtlCol="0">
+            <a:spAutoFit/>
+          </a:bodyPr>
+          <a:lstStyle/>
+          <a:p>
+            <a:r>
+              <a:rPr lang="en-IE" sz="2000" b="1" dirty="0">
+                <a:solidFill>
+                  <a:srgbClr val="000080"/>
+                </a:solidFill>
+                <a:effectLst/>
+              </a:rPr>
+              <a:t>import </a:t>
+            </a:r>
+            <a:r>
+              <a:rPr lang="en-IE" sz="2000" dirty="0" err="1"/>
+              <a:t>java.util.Scanner</a:t>
+            </a:r>
+            <a:r>
+              <a:rPr lang="en-IE" sz="2000" dirty="0"/>
+              <a:t>;</a:t>
+            </a:r>
+            <a:br>
+              <a:rPr lang="en-IE" sz="2000" dirty="0"/>
+            </a:br>
+            <a:r>
+              <a:rPr lang="en-IE" sz="2000" dirty="0"/>
+              <a:t> :</a:t>
+            </a:r>
+          </a:p>
+          <a:p>
+            <a:r>
+              <a:rPr lang="en-IE" sz="2000" dirty="0"/>
+              <a:t>Scanner </a:t>
+            </a:r>
+            <a:r>
+              <a:rPr lang="en-IE" sz="2000" i="1" dirty="0">
+                <a:solidFill>
+                  <a:srgbClr val="660E7A"/>
+                </a:solidFill>
+                <a:effectLst/>
+              </a:rPr>
+              <a:t>input </a:t>
+            </a:r>
+            <a:r>
+              <a:rPr lang="en-IE" sz="2000" dirty="0"/>
+              <a:t>= </a:t>
+            </a:r>
+            <a:r>
+              <a:rPr lang="en-IE" sz="2000" b="1" dirty="0">
+                <a:solidFill>
+                  <a:srgbClr val="000080"/>
+                </a:solidFill>
+                <a:effectLst/>
+              </a:rPr>
+              <a:t>new </a:t>
+            </a:r>
+            <a:r>
+              <a:rPr lang="en-IE" sz="2000" dirty="0"/>
+              <a:t>Scanner(</a:t>
+            </a:r>
+            <a:r>
+              <a:rPr lang="en-IE" sz="2000" dirty="0" err="1"/>
+              <a:t>System.</a:t>
+            </a:r>
+            <a:r>
+              <a:rPr lang="en-IE" sz="2000" b="1" i="1" dirty="0" err="1">
+                <a:solidFill>
+                  <a:srgbClr val="660E7A"/>
+                </a:solidFill>
+                <a:effectLst/>
+              </a:rPr>
+              <a:t>in</a:t>
+            </a:r>
+            <a:r>
+              <a:rPr lang="en-IE" sz="2000" dirty="0"/>
+              <a:t>);</a:t>
+            </a:r>
+          </a:p>
+          <a:p>
+            <a:r>
+              <a:rPr lang="en-IE" sz="2000" dirty="0"/>
+              <a:t> :</a:t>
+            </a:r>
+            <a:endParaRPr lang="en-US" sz="2000" dirty="0">
+              <a:latin typeface="Arial" panose="020B0604020202020204" pitchFamily="34" charset="0"/>
+              <a:cs typeface="Arial" panose="020B0604020202020204" pitchFamily="34" charset="0"/>
+            </a:endParaRPr>
+          </a:p>
+          <a:p>
+            <a:r>
+              <a:rPr lang="en-US" sz="2000" b="1" dirty="0" err="1">
+                <a:latin typeface="Arial" panose="020B0604020202020204" pitchFamily="34" charset="0"/>
+                <a:cs typeface="Arial" panose="020B0604020202020204" pitchFamily="34" charset="0"/>
+              </a:rPr>
+              <a:t>int</a:t>
+            </a:r>
+            <a:r>
+              <a:rPr lang="en-US" sz="2000" b="1" dirty="0">
+                <a:latin typeface="Arial" panose="020B0604020202020204" pitchFamily="34" charset="0"/>
+                <a:cs typeface="Arial" panose="020B0604020202020204" pitchFamily="34" charset="0"/>
+              </a:rPr>
+              <a:t> numbers[] = new </a:t>
+            </a:r>
+            <a:r>
+              <a:rPr lang="en-US" sz="2000" b="1" dirty="0" err="1">
+                <a:latin typeface="Arial" panose="020B0604020202020204" pitchFamily="34" charset="0"/>
+                <a:cs typeface="Arial" panose="020B0604020202020204" pitchFamily="34" charset="0"/>
+              </a:rPr>
+              <a:t>int</a:t>
+            </a:r>
+            <a:r>
+              <a:rPr lang="en-US" sz="2000" b="1" dirty="0">
+                <a:latin typeface="Arial" panose="020B0604020202020204" pitchFamily="34" charset="0"/>
+                <a:cs typeface="Arial" panose="020B0604020202020204" pitchFamily="34" charset="0"/>
+              </a:rPr>
+              <a:t>[10];           </a:t>
+            </a:r>
+          </a:p>
+          <a:p>
+            <a:r>
+              <a:rPr lang="en-US" sz="2000" dirty="0" err="1">
+                <a:latin typeface="Arial" panose="020B0604020202020204" pitchFamily="34" charset="0"/>
+                <a:cs typeface="Arial" panose="020B0604020202020204" pitchFamily="34" charset="0"/>
+              </a:rPr>
+              <a:t>int</a:t>
+            </a:r>
+            <a:r>
+              <a:rPr lang="en-US" sz="2000" dirty="0">
+                <a:latin typeface="Arial" panose="020B0604020202020204" pitchFamily="34" charset="0"/>
+                <a:cs typeface="Arial" panose="020B0604020202020204" pitchFamily="34" charset="0"/>
+              </a:rPr>
+              <a:t> sum = 0;</a:t>
+            </a:r>
+          </a:p>
+          <a:p>
+            <a:endParaRPr lang="en-US" sz="2000" dirty="0">
+              <a:latin typeface="Arial" panose="020B0604020202020204" pitchFamily="34" charset="0"/>
+              <a:cs typeface="Arial" panose="020B0604020202020204" pitchFamily="34" charset="0"/>
+            </a:endParaRPr>
+          </a:p>
+          <a:p>
+            <a:r>
+              <a:rPr lang="en-US" sz="2000" dirty="0">
+                <a:solidFill>
+                  <a:srgbClr val="0070C0"/>
+                </a:solidFill>
+                <a:latin typeface="Arial" panose="020B0604020202020204" pitchFamily="34" charset="0"/>
+                <a:cs typeface="Arial" panose="020B0604020202020204" pitchFamily="34" charset="0"/>
+              </a:rPr>
+              <a:t>//read in the data</a:t>
+            </a:r>
+          </a:p>
+          <a:p>
+            <a:r>
+              <a:rPr lang="en-US" sz="2000" dirty="0">
+                <a:latin typeface="Arial" panose="020B0604020202020204" pitchFamily="34" charset="0"/>
+                <a:cs typeface="Arial" panose="020B0604020202020204" pitchFamily="34" charset="0"/>
+              </a:rPr>
+              <a:t>for (</a:t>
+            </a:r>
+            <a:r>
+              <a:rPr lang="en-US" sz="2000" dirty="0" err="1">
+                <a:latin typeface="Arial" panose="020B0604020202020204" pitchFamily="34" charset="0"/>
+                <a:cs typeface="Arial" panose="020B0604020202020204" pitchFamily="34" charset="0"/>
+              </a:rPr>
+              <a:t>int</a:t>
+            </a:r>
+            <a:r>
+              <a:rPr lang="en-US" sz="2000" dirty="0">
+                <a:latin typeface="Arial" panose="020B0604020202020204" pitchFamily="34" charset="0"/>
+                <a:cs typeface="Arial" panose="020B0604020202020204" pitchFamily="34" charset="0"/>
+              </a:rPr>
+              <a:t> </a:t>
+            </a:r>
+            <a:r>
+              <a:rPr lang="en-US" sz="2000" dirty="0" err="1">
+                <a:latin typeface="Arial" panose="020B0604020202020204" pitchFamily="34" charset="0"/>
+                <a:cs typeface="Arial" panose="020B0604020202020204" pitchFamily="34" charset="0"/>
+              </a:rPr>
+              <a:t>i</a:t>
+            </a:r>
+            <a:r>
+              <a:rPr lang="en-US" sz="2000" dirty="0">
+                <a:latin typeface="Arial" panose="020B0604020202020204" pitchFamily="34" charset="0"/>
+                <a:cs typeface="Arial" panose="020B0604020202020204" pitchFamily="34" charset="0"/>
+              </a:rPr>
+              <a:t> = 0; </a:t>
+            </a:r>
+            <a:r>
+              <a:rPr lang="en-US" sz="2000" dirty="0" err="1">
+                <a:latin typeface="Arial" panose="020B0604020202020204" pitchFamily="34" charset="0"/>
+                <a:cs typeface="Arial" panose="020B0604020202020204" pitchFamily="34" charset="0"/>
+              </a:rPr>
+              <a:t>i</a:t>
+            </a:r>
+            <a:r>
+              <a:rPr lang="en-US" sz="2000" dirty="0">
+                <a:latin typeface="Arial" panose="020B0604020202020204" pitchFamily="34" charset="0"/>
+                <a:cs typeface="Arial" panose="020B0604020202020204" pitchFamily="34" charset="0"/>
+              </a:rPr>
+              <a:t> &lt; 10 ; </a:t>
+            </a:r>
+            <a:r>
+              <a:rPr lang="en-US" sz="2000" dirty="0" err="1">
+                <a:latin typeface="Arial" panose="020B0604020202020204" pitchFamily="34" charset="0"/>
+                <a:cs typeface="Arial" panose="020B0604020202020204" pitchFamily="34" charset="0"/>
+              </a:rPr>
+              <a:t>i</a:t>
+            </a:r>
+            <a:r>
+              <a:rPr lang="en-US" sz="2000" dirty="0">
+                <a:latin typeface="Arial" panose="020B0604020202020204" pitchFamily="34" charset="0"/>
+                <a:cs typeface="Arial" panose="020B0604020202020204" pitchFamily="34" charset="0"/>
+              </a:rPr>
+              <a:t> ++)  {    </a:t>
+            </a:r>
+          </a:p>
+          <a:p>
+            <a:r>
+              <a:rPr lang="en-US" sz="2000" dirty="0">
+                <a:latin typeface="Arial" panose="020B0604020202020204" pitchFamily="34" charset="0"/>
+                <a:cs typeface="Arial" panose="020B0604020202020204" pitchFamily="34" charset="0"/>
+              </a:rPr>
+              <a:t>        </a:t>
+            </a:r>
+            <a:r>
+              <a:rPr lang="en-US" sz="2000" b="1" dirty="0">
+                <a:latin typeface="Arial" panose="020B0604020202020204" pitchFamily="34" charset="0"/>
+                <a:cs typeface="Arial" panose="020B0604020202020204" pitchFamily="34" charset="0"/>
+              </a:rPr>
+              <a:t>numbers[</a:t>
+            </a:r>
+            <a:r>
+              <a:rPr lang="en-US" sz="2000" b="1" dirty="0" err="1">
+                <a:latin typeface="Arial" panose="020B0604020202020204" pitchFamily="34" charset="0"/>
+                <a:cs typeface="Arial" panose="020B0604020202020204" pitchFamily="34" charset="0"/>
+              </a:rPr>
+              <a:t>i</a:t>
+            </a:r>
+            <a:r>
+              <a:rPr lang="en-US" sz="2000" b="1" dirty="0">
+                <a:latin typeface="Arial" panose="020B0604020202020204" pitchFamily="34" charset="0"/>
+                <a:cs typeface="Arial" panose="020B0604020202020204" pitchFamily="34" charset="0"/>
+              </a:rPr>
+              <a:t>] </a:t>
+            </a:r>
+            <a:r>
+              <a:rPr lang="en-US" sz="2000" dirty="0">
+                <a:latin typeface="Arial" panose="020B0604020202020204" pitchFamily="34" charset="0"/>
+                <a:cs typeface="Arial" panose="020B0604020202020204" pitchFamily="34" charset="0"/>
+              </a:rPr>
+              <a:t>= </a:t>
+            </a:r>
+            <a:r>
+              <a:rPr lang="en-US" sz="2000" dirty="0" err="1">
+                <a:latin typeface="Arial" panose="020B0604020202020204" pitchFamily="34" charset="0"/>
+                <a:cs typeface="Arial" panose="020B0604020202020204" pitchFamily="34" charset="0"/>
+              </a:rPr>
+              <a:t>input.readInt();</a:t>
+            </a:r>
+            <a:endParaRPr lang="en-US" sz="2000" dirty="0">
+              <a:latin typeface="Arial" panose="020B0604020202020204" pitchFamily="34" charset="0"/>
+              <a:cs typeface="Arial" panose="020B0604020202020204" pitchFamily="34" charset="0"/>
+            </a:endParaRPr>
+          </a:p>
+          <a:p>
+            <a:r>
+              <a:rPr lang="en-US" sz="2000" dirty="0">
+                <a:latin typeface="Arial" panose="020B0604020202020204" pitchFamily="34" charset="0"/>
+                <a:cs typeface="Arial" panose="020B0604020202020204" pitchFamily="34" charset="0"/>
+              </a:rPr>
+              <a:t>}      </a:t>
+            </a:r>
+          </a:p>
+          <a:p>
+            <a:endParaRPr lang="en-US" sz="2000" dirty="0">
+              <a:latin typeface="Arial" panose="020B0604020202020204" pitchFamily="34" charset="0"/>
+              <a:cs typeface="Arial" panose="020B0604020202020204" pitchFamily="34" charset="0"/>
+            </a:endParaRPr>
+          </a:p>
+          <a:p>
+            <a:r>
+              <a:rPr lang="en-US" sz="2000" dirty="0">
+                <a:solidFill>
+                  <a:srgbClr val="0070C0"/>
+                </a:solidFill>
+                <a:latin typeface="Arial" panose="020B0604020202020204" pitchFamily="34" charset="0"/>
+                <a:cs typeface="Arial" panose="020B0604020202020204" pitchFamily="34" charset="0"/>
+              </a:rPr>
+              <a:t>// now we sum the values</a:t>
+            </a:r>
+          </a:p>
+          <a:p>
+            <a:r>
+              <a:rPr lang="en-US" sz="2000" dirty="0">
+                <a:latin typeface="Arial" panose="020B0604020202020204" pitchFamily="34" charset="0"/>
+                <a:cs typeface="Arial" panose="020B0604020202020204" pitchFamily="34" charset="0"/>
+              </a:rPr>
+              <a:t>for (</a:t>
+            </a:r>
+            <a:r>
+              <a:rPr lang="en-US" sz="2000" dirty="0" err="1">
+                <a:latin typeface="Arial" panose="020B0604020202020204" pitchFamily="34" charset="0"/>
+                <a:cs typeface="Arial" panose="020B0604020202020204" pitchFamily="34" charset="0"/>
+              </a:rPr>
+              <a:t>int</a:t>
+            </a:r>
+            <a:r>
+              <a:rPr lang="en-US" sz="2000" dirty="0">
+                <a:latin typeface="Arial" panose="020B0604020202020204" pitchFamily="34" charset="0"/>
+                <a:cs typeface="Arial" panose="020B0604020202020204" pitchFamily="34" charset="0"/>
+              </a:rPr>
+              <a:t> </a:t>
+            </a:r>
+            <a:r>
+              <a:rPr lang="en-US" sz="2000" dirty="0" err="1">
+                <a:latin typeface="Arial" panose="020B0604020202020204" pitchFamily="34" charset="0"/>
+                <a:cs typeface="Arial" panose="020B0604020202020204" pitchFamily="34" charset="0"/>
+              </a:rPr>
+              <a:t>i</a:t>
+            </a:r>
+            <a:r>
+              <a:rPr lang="en-US" sz="2000" dirty="0">
+                <a:latin typeface="Arial" panose="020B0604020202020204" pitchFamily="34" charset="0"/>
+                <a:cs typeface="Arial" panose="020B0604020202020204" pitchFamily="34" charset="0"/>
+              </a:rPr>
+              <a:t> = 0; </a:t>
+            </a:r>
+            <a:r>
+              <a:rPr lang="en-US" sz="2000" dirty="0" err="1">
+                <a:latin typeface="Arial" panose="020B0604020202020204" pitchFamily="34" charset="0"/>
+                <a:cs typeface="Arial" panose="020B0604020202020204" pitchFamily="34" charset="0"/>
+              </a:rPr>
+              <a:t>i</a:t>
+            </a:r>
+            <a:r>
+              <a:rPr lang="en-US" sz="2000" dirty="0">
+                <a:latin typeface="Arial" panose="020B0604020202020204" pitchFamily="34" charset="0"/>
+                <a:cs typeface="Arial" panose="020B0604020202020204" pitchFamily="34" charset="0"/>
+              </a:rPr>
+              <a:t> &lt; 10 ; </a:t>
+            </a:r>
+            <a:r>
+              <a:rPr lang="en-US" sz="2000" dirty="0" err="1">
+                <a:latin typeface="Arial" panose="020B0604020202020204" pitchFamily="34" charset="0"/>
+                <a:cs typeface="Arial" panose="020B0604020202020204" pitchFamily="34" charset="0"/>
+              </a:rPr>
+              <a:t>i</a:t>
+            </a:r>
+            <a:r>
+              <a:rPr lang="en-US" sz="2000" dirty="0">
+                <a:latin typeface="Arial" panose="020B0604020202020204" pitchFamily="34" charset="0"/>
+                <a:cs typeface="Arial" panose="020B0604020202020204" pitchFamily="34" charset="0"/>
+              </a:rPr>
+              <a:t> ++)   {   </a:t>
+            </a:r>
+          </a:p>
+          <a:p>
+            <a:r>
+              <a:rPr lang="en-US" sz="2000" dirty="0">
+                <a:latin typeface="Arial" panose="020B0604020202020204" pitchFamily="34" charset="0"/>
+                <a:cs typeface="Arial" panose="020B0604020202020204" pitchFamily="34" charset="0"/>
+              </a:rPr>
+              <a:t>        </a:t>
+            </a:r>
+            <a:r>
+              <a:rPr lang="en-US" sz="2000" b="1" dirty="0">
+                <a:latin typeface="Arial" panose="020B0604020202020204" pitchFamily="34" charset="0"/>
+                <a:cs typeface="Arial" panose="020B0604020202020204" pitchFamily="34" charset="0"/>
+              </a:rPr>
+              <a:t>sum += numbers[</a:t>
+            </a:r>
+            <a:r>
+              <a:rPr lang="en-US" sz="2000" b="1" dirty="0" err="1">
+                <a:latin typeface="Arial" panose="020B0604020202020204" pitchFamily="34" charset="0"/>
+                <a:cs typeface="Arial" panose="020B0604020202020204" pitchFamily="34" charset="0"/>
+              </a:rPr>
+              <a:t>i</a:t>
+            </a:r>
+            <a:r>
+              <a:rPr lang="en-US" sz="2000" b="1" dirty="0">
+                <a:latin typeface="Arial" panose="020B0604020202020204" pitchFamily="34" charset="0"/>
+                <a:cs typeface="Arial" panose="020B0604020202020204" pitchFamily="34" charset="0"/>
+              </a:rPr>
+              <a:t>];  </a:t>
+            </a:r>
+          </a:p>
+          <a:p>
+            <a:r>
+              <a:rPr lang="en-US" sz="2000" dirty="0">
+                <a:latin typeface="Arial" panose="020B0604020202020204" pitchFamily="34" charset="0"/>
+                <a:cs typeface="Arial" panose="020B0604020202020204" pitchFamily="34" charset="0"/>
+              </a:rPr>
+              <a:t>} </a:t>
+            </a:r>
+          </a:p>
+          <a:p>
+            <a:endParaRPr lang="en-US" sz="2000" dirty="0">
+              <a:latin typeface="Arial" panose="020B0604020202020204" pitchFamily="34" charset="0"/>
+              <a:cs typeface="Arial" panose="020B0604020202020204" pitchFamily="34" charset="0"/>
+            </a:endParaRPr>
+          </a:p>
+          <a:p>
+            <a:r>
+              <a:rPr lang="en-US" sz="2000" dirty="0" err="1">
+                <a:latin typeface="Arial" panose="020B0604020202020204" pitchFamily="34" charset="0"/>
+                <a:cs typeface="Arial" panose="020B0604020202020204" pitchFamily="34" charset="0"/>
+              </a:rPr>
+              <a:t>System.out.println</a:t>
+            </a:r>
+            <a:r>
+              <a:rPr lang="en-US" sz="2000" dirty="0">
+                <a:latin typeface="Arial" panose="020B0604020202020204" pitchFamily="34" charset="0"/>
+                <a:cs typeface="Arial" panose="020B0604020202020204" pitchFamily="34" charset="0"/>
+              </a:rPr>
+              <a:t>("The sum of the values you typed in is : " + sum);</a:t>
+            </a:r>
+          </a:p>
+        </p:txBody>
+      </p:sp>
+      <p:sp>
+        <p:nvSpPr>
+          <p:cNvPr id="6" name="Rectangle 5">
+            <a:extLst>
+              <a:ext uri="{FF2B5EF4-FFF2-40B4-BE49-F238E27FC236}">
+                <a16:creationId xmlns:a16="http://schemas.microsoft.com/office/drawing/2014/main" id="{77611231-9EA1-43F6-BEDB-9B8EBF6CCC47}"/>
+              </a:ext>
+            </a:extLst>
+          </p:cNvPr>
+          <p:cNvSpPr/>
+          <p:nvPr/>
+        </p:nvSpPr>
+        <p:spPr>
+          <a:xfrm>
+            <a:off x="6625652" y="6444862"/>
+            <a:ext cx="5562600" cy="276999"/>
+          </a:xfrm>
+          <a:prstGeom prst="rect">
+            <a:avLst/>
+          </a:prstGeom>
+        </p:spPr>
+        <p:txBody>
+          <a:bodyPr wrap="square">
+            <a:spAutoFit/>
+          </a:bodyPr>
+          <a:lstStyle/>
+          <a:p>
+            <a:pPr algn="r"/>
+            <a:r>
+              <a:rPr lang="en-IE" sz="1200" dirty="0"/>
+              <a:t>Source:  </a:t>
+            </a:r>
+            <a:r>
+              <a:rPr lang="en-IE" sz="1200" dirty="0" err="1"/>
+              <a:t>Reas</a:t>
+            </a:r>
+            <a:r>
+              <a:rPr lang="en-IE" sz="1200" dirty="0"/>
+              <a:t> &amp; Fry (2014)</a:t>
+            </a:r>
+          </a:p>
+        </p:txBody>
+      </p:sp>
+      <p:sp>
+        <p:nvSpPr>
+          <p:cNvPr id="7" name="TextBox 6">
+            <a:extLst>
+              <a:ext uri="{FF2B5EF4-FFF2-40B4-BE49-F238E27FC236}">
+                <a16:creationId xmlns:a16="http://schemas.microsoft.com/office/drawing/2014/main" id="{394ECE76-B38B-4C6A-B487-C423E55B0B91}"/>
+              </a:ext>
+            </a:extLst>
+          </p:cNvPr>
+          <p:cNvSpPr txBox="1"/>
+          <p:nvPr/>
+        </p:nvSpPr>
+        <p:spPr>
+          <a:xfrm>
+            <a:off x="6324602" y="1178660"/>
+            <a:ext cx="4190998" cy="2246769"/>
+          </a:xfrm>
+          <a:prstGeom prst="rect">
+            <a:avLst/>
+          </a:prstGeom>
+          <a:ln/>
+        </p:spPr>
+        <p:style>
+          <a:lnRef idx="1">
+            <a:schemeClr val="accent4"/>
+          </a:lnRef>
+          <a:fillRef idx="2">
+            <a:schemeClr val="accent4"/>
+          </a:fillRef>
+          <a:effectRef idx="1">
+            <a:schemeClr val="accent4"/>
+          </a:effectRef>
+          <a:fontRef idx="minor">
+            <a:schemeClr val="dk1"/>
+          </a:fontRef>
+        </p:style>
+        <p:txBody>
+          <a:bodyPr wrap="square" rtlCol="0">
+            <a:spAutoFit/>
+          </a:bodyPr>
+          <a:lstStyle/>
+          <a:p>
+            <a:pPr algn="ctr"/>
+            <a:r>
+              <a:rPr lang="en-US" sz="2800" b="1" dirty="0">
+                <a:solidFill>
+                  <a:srgbClr val="FF0000"/>
+                </a:solidFill>
+              </a:rPr>
+              <a:t>Q: </a:t>
+            </a:r>
+            <a:r>
+              <a:rPr lang="en-US" sz="2800" dirty="0"/>
+              <a:t>Can we reduce the code to only have </a:t>
+            </a:r>
+            <a:r>
+              <a:rPr lang="en-US" sz="2800" b="1" dirty="0"/>
+              <a:t>one loop?</a:t>
+            </a:r>
+          </a:p>
+          <a:p>
+            <a:pPr algn="ctr"/>
+            <a:endParaRPr lang="en-US" sz="2800" b="1" dirty="0"/>
+          </a:p>
+          <a:p>
+            <a:pPr algn="ctr"/>
+            <a:r>
+              <a:rPr lang="en-US" sz="2800" dirty="0"/>
+              <a:t>Could we move the “sum” code into the first loop?</a:t>
+            </a:r>
+            <a:endParaRPr lang="en-US" sz="2800" dirty="0">
+              <a:solidFill>
+                <a:schemeClr val="tx1"/>
+              </a:solidFill>
+            </a:endParaRPr>
+          </a:p>
+        </p:txBody>
+      </p:sp>
+      <p:sp>
+        <p:nvSpPr>
+          <p:cNvPr id="3" name="TextBox 2"/>
+          <p:cNvSpPr txBox="1"/>
+          <p:nvPr/>
+        </p:nvSpPr>
+        <p:spPr>
+          <a:xfrm>
+            <a:off x="4317365" y="2858870"/>
+            <a:ext cx="817853" cy="646331"/>
+          </a:xfrm>
+          <a:prstGeom prst="rect">
+            <a:avLst/>
+          </a:prstGeom>
+          <a:noFill/>
+        </p:spPr>
+        <p:txBody>
+          <a:bodyPr wrap="none" rtlCol="0">
+            <a:spAutoFit/>
+          </a:bodyPr>
+          <a:lstStyle/>
+          <a:p>
+            <a:r>
+              <a:rPr lang="en-GB" b="1" dirty="0">
+                <a:solidFill>
+                  <a:srgbClr val="FF0000"/>
+                </a:solidFill>
+              </a:rPr>
+              <a:t>Loop 1</a:t>
+            </a:r>
+          </a:p>
+          <a:p>
+            <a:endParaRPr lang="en-GB" dirty="0">
+              <a:solidFill>
+                <a:srgbClr val="FF0000"/>
+              </a:solidFill>
+            </a:endParaRPr>
+          </a:p>
+        </p:txBody>
+      </p:sp>
+      <p:sp>
+        <p:nvSpPr>
+          <p:cNvPr id="4" name="TextBox 3"/>
+          <p:cNvSpPr txBox="1"/>
+          <p:nvPr/>
+        </p:nvSpPr>
+        <p:spPr>
+          <a:xfrm>
+            <a:off x="4953001" y="4673768"/>
+            <a:ext cx="817853" cy="369332"/>
+          </a:xfrm>
+          <a:prstGeom prst="rect">
+            <a:avLst/>
+          </a:prstGeom>
+          <a:noFill/>
+        </p:spPr>
+        <p:txBody>
+          <a:bodyPr wrap="none" rtlCol="0">
+            <a:spAutoFit/>
+          </a:bodyPr>
+          <a:lstStyle/>
+          <a:p>
+            <a:r>
+              <a:rPr lang="en-GB" b="1" dirty="0">
+                <a:solidFill>
+                  <a:srgbClr val="FF0000"/>
+                </a:solidFill>
+              </a:rPr>
+              <a:t>Loop 2</a:t>
+            </a:r>
+          </a:p>
+        </p:txBody>
+      </p:sp>
+    </p:spTree>
+    <p:extLst>
+      <p:ext uri="{BB962C8B-B14F-4D97-AF65-F5344CB8AC3E}">
+        <p14:creationId xmlns:p14="http://schemas.microsoft.com/office/powerpoint/2010/main" val="316799238"/>
+      </p:ext>
+    </p:extLst>
+  </p:cSld>
+  <p:clrMapOvr>
+    <a:masterClrMapping/>
+  </p:clrMapOvr>
+</p:sld>
+</file>
+
+<file path=ppt/slides/slide31.xml><?xml version="1.0" encoding="utf-8"?>
+<p:sld xmlns:a="http://schemas.openxmlformats.org/drawingml/2006/main" xmlns:r="http://schemas.openxmlformats.org/officeDocument/2006/relationships" xmlns:p="http://schemas.openxmlformats.org/presentationml/2006/main">
+  <p:cSld>
+    <p:spTree>
+      <p:nvGrpSpPr>
+        <p:cNvPr id="1" name=""/>
+        <p:cNvGrpSpPr/>
+        <p:nvPr/>
+      </p:nvGrpSpPr>
+      <p:grpSpPr>
+        <a:xfrm>
+          <a:off x="0" y="0"/>
+          <a:ext cx="0" cy="0"/>
+          <a:chOff x="0" y="0"/>
+          <a:chExt cx="0" cy="0"/>
+        </a:xfrm>
+      </p:grpSpPr>
+      <p:sp>
+        <p:nvSpPr>
+          <p:cNvPr id="2" name="Title 1"/>
+          <p:cNvSpPr>
+            <a:spLocks noGrp="1"/>
+          </p:cNvSpPr>
+          <p:nvPr>
+            <p:ph type="title"/>
+          </p:nvPr>
+        </p:nvSpPr>
+        <p:spPr/>
+        <p:txBody>
+          <a:bodyPr/>
+          <a:lstStyle/>
+          <a:p>
+            <a:pPr algn="ctr"/>
+            <a:r>
+              <a:rPr lang="en-IE" dirty="0"/>
+              <a:t>Using arrays to remember numbers</a:t>
+            </a:r>
+          </a:p>
+        </p:txBody>
+      </p:sp>
+      <p:sp>
+        <p:nvSpPr>
+          <p:cNvPr id="11" name="TextBox 10"/>
+          <p:cNvSpPr txBox="1"/>
+          <p:nvPr/>
+        </p:nvSpPr>
+        <p:spPr>
+          <a:xfrm>
             <a:off x="1890712" y="1594377"/>
             <a:ext cx="8410575" cy="4401205"/>
           </a:xfrm>
@@ -25723,7 +27474,7 @@
 </p:sld>
 </file>
 
-<file path=ppt/slides/slide31.xml><?xml version="1.0" encoding="utf-8"?>
+<file path=ppt/slides/slide32.xml><?xml version="1.0" encoding="utf-8"?>
 <p:sld xmlns:a="http://schemas.openxmlformats.org/drawingml/2006/main" xmlns:r="http://schemas.openxmlformats.org/officeDocument/2006/relationships" xmlns:p="http://schemas.openxmlformats.org/presentationml/2006/main">
   <p:cSld>
     <p:spTree>
@@ -25828,7 +27579,7 @@
 </p:sld>
 </file>
 
-<file path=ppt/slides/slide32.xml><?xml version="1.0" encoding="utf-8"?>
+<file path=ppt/slides/slide33.xml><?xml version="1.0" encoding="utf-8"?>
 <p:sld xmlns:a="http://schemas.openxmlformats.org/drawingml/2006/main" xmlns:r="http://schemas.openxmlformats.org/officeDocument/2006/relationships" xmlns:p="http://schemas.openxmlformats.org/presentationml/2006/main">
   <p:cSld>
     <p:spTree>
@@ -26897,7 +28648,7 @@
 </p:sld>
 </file>
 
-<file path=ppt/slides/slide33.xml><?xml version="1.0" encoding="utf-8"?>
+<file path=ppt/slides/slide34.xml><?xml version="1.0" encoding="utf-8"?>
 <p:sld xmlns:a="http://schemas.openxmlformats.org/drawingml/2006/main" xmlns:r="http://schemas.openxmlformats.org/officeDocument/2006/relationships" xmlns:p="http://schemas.openxmlformats.org/presentationml/2006/main">
   <p:cSld>
     <p:spTree>
@@ -27227,7 +28978,7 @@
 </p:sld>
 </file>
 
-<file path=ppt/slides/slide34.xml><?xml version="1.0" encoding="utf-8"?>
+<file path=ppt/slides/slide35.xml><?xml version="1.0" encoding="utf-8"?>
 <p:sld xmlns:a="http://schemas.openxmlformats.org/drawingml/2006/main" xmlns:r="http://schemas.openxmlformats.org/officeDocument/2006/relationships" xmlns:p="http://schemas.openxmlformats.org/presentationml/2006/main">
   <p:cSld>
     <p:spTree>
@@ -27332,7 +29083,7 @@
 </p:sld>
 </file>
 
-<file path=ppt/slides/slide35.xml><?xml version="1.0" encoding="utf-8"?>
+<file path=ppt/slides/slide36.xml><?xml version="1.0" encoding="utf-8"?>
 <p:sld xmlns:a="http://schemas.openxmlformats.org/drawingml/2006/main" xmlns:r="http://schemas.openxmlformats.org/officeDocument/2006/relationships" xmlns:p="http://schemas.openxmlformats.org/presentationml/2006/main">
   <p:cSld>
     <p:spTree>
@@ -27825,7 +29576,7 @@
 </p:sld>
 </file>
 
-<file path=ppt/slides/slide36.xml><?xml version="1.0" encoding="utf-8"?>
+<file path=ppt/slides/slide37.xml><?xml version="1.0" encoding="utf-8"?>
 <p:sld xmlns:a="http://schemas.openxmlformats.org/drawingml/2006/main" xmlns:r="http://schemas.openxmlformats.org/officeDocument/2006/relationships" xmlns:p="http://schemas.openxmlformats.org/presentationml/2006/main">
   <p:cSld>
     <p:spTree>
@@ -28155,7 +29906,7 @@
 </p:sld>
 </file>
 
-<file path=ppt/slides/slide37.xml><?xml version="1.0" encoding="utf-8"?>
+<file path=ppt/slides/slide38.xml><?xml version="1.0" encoding="utf-8"?>
 <p:sld xmlns:a="http://schemas.openxmlformats.org/drawingml/2006/main" xmlns:r="http://schemas.openxmlformats.org/officeDocument/2006/relationships" xmlns:p="http://schemas.openxmlformats.org/presentationml/2006/main">
   <p:cSld>
     <p:spTree>
@@ -28253,127 +30004,6 @@
     <p:extLst>
       <p:ext uri="{BB962C8B-B14F-4D97-AF65-F5344CB8AC3E}">
         <p14:creationId xmlns:p14="http://schemas.microsoft.com/office/powerpoint/2010/main" val="3191768653"/>
-      </p:ext>
-    </p:extLst>
-  </p:cSld>
-  <p:clrMapOvr>
-    <a:masterClrMapping/>
-  </p:clrMapOvr>
-</p:sld>
-</file>
-
-<file path=ppt/slides/slide38.xml><?xml version="1.0" encoding="utf-8"?>
-<p:sld xmlns:a="http://schemas.openxmlformats.org/drawingml/2006/main" xmlns:r="http://schemas.openxmlformats.org/officeDocument/2006/relationships" xmlns:p="http://schemas.openxmlformats.org/presentationml/2006/main">
-  <p:cSld>
-    <p:spTree>
-      <p:nvGrpSpPr>
-        <p:cNvPr id="1" name=""/>
-        <p:cNvGrpSpPr/>
-        <p:nvPr/>
-      </p:nvGrpSpPr>
-      <p:grpSpPr>
-        <a:xfrm>
-          <a:off x="0" y="0"/>
-          <a:ext cx="0" cy="0"/>
-          <a:chOff x="0" y="0"/>
-          <a:chExt cx="0" cy="0"/>
-        </a:xfrm>
-      </p:grpSpPr>
-      <p:sp>
-        <p:nvSpPr>
-          <p:cNvPr id="4" name="Title 3"/>
-          <p:cNvSpPr>
-            <a:spLocks noGrp="1"/>
-          </p:cNvSpPr>
-          <p:nvPr>
-            <p:ph type="title"/>
-          </p:nvPr>
-        </p:nvSpPr>
-        <p:spPr/>
-        <p:txBody>
-          <a:bodyPr>
-            <a:noAutofit/>
-          </a:bodyPr>
-          <a:lstStyle/>
-          <a:p>
-            <a:r>
-              <a:rPr lang="en-IE" sz="3200" dirty="0"/>
-              <a:t>Do we have to use all elements in the array?</a:t>
-            </a:r>
-          </a:p>
-        </p:txBody>
-      </p:sp>
-      <p:sp>
-        <p:nvSpPr>
-          <p:cNvPr id="5" name="Content Placeholder 4"/>
-          <p:cNvSpPr>
-            <a:spLocks noGrp="1"/>
-          </p:cNvSpPr>
-          <p:nvPr>
-            <p:ph idx="1"/>
-          </p:nvPr>
-        </p:nvSpPr>
-        <p:spPr/>
-        <p:txBody>
-          <a:bodyPr>
-            <a:normAutofit/>
-          </a:bodyPr>
-          <a:lstStyle/>
-          <a:p>
-            <a:r>
-              <a:rPr lang="en-IE" dirty="0"/>
-              <a:t>No.  </a:t>
-            </a:r>
-          </a:p>
-          <a:p>
-            <a:endParaRPr lang="en-IE" dirty="0"/>
-          </a:p>
-          <a:p>
-            <a:r>
-              <a:rPr lang="en-IE" dirty="0">
-                <a:solidFill>
-                  <a:srgbClr val="FF0000"/>
-                </a:solidFill>
-              </a:rPr>
-              <a:t>But</a:t>
-            </a:r>
-            <a:r>
-              <a:rPr lang="en-IE" dirty="0"/>
-              <a:t>…this might cause logic errors, </a:t>
-            </a:r>
-            <a:br>
-              <a:rPr lang="en-IE" dirty="0"/>
-            </a:br>
-            <a:r>
-              <a:rPr lang="en-IE" dirty="0"/>
-              <a:t>if we don’t take this into consideration </a:t>
-            </a:r>
-            <a:br>
-              <a:rPr lang="en-IE" dirty="0"/>
-            </a:br>
-            <a:r>
-              <a:rPr lang="en-IE" dirty="0"/>
-              <a:t>in our coding.</a:t>
-            </a:r>
-          </a:p>
-          <a:p>
-            <a:pPr marL="0" indent="0">
-              <a:buNone/>
-            </a:pPr>
-            <a:endParaRPr lang="en-IE" dirty="0"/>
-          </a:p>
-          <a:p>
-            <a:r>
-              <a:rPr lang="en-IE" dirty="0"/>
-              <a:t>Consider this scenario…</a:t>
-            </a:r>
-          </a:p>
-        </p:txBody>
-      </p:sp>
-    </p:spTree>
-    <p:extLst>
-      <p:ext uri="{BB962C8B-B14F-4D97-AF65-F5344CB8AC3E}">
-        <p14:creationId xmlns:p14="http://schemas.microsoft.com/office/powerpoint/2010/main" val="3213866818"/>
       </p:ext>
     </p:extLst>
   </p:cSld>
@@ -28410,12 +30040,7 @@
             <p:ph type="title"/>
           </p:nvPr>
         </p:nvSpPr>
-        <p:spPr>
-          <a:xfrm>
-            <a:off x="1981200" y="274638"/>
-            <a:ext cx="8229600" cy="1143000"/>
-          </a:xfrm>
-        </p:spPr>
+        <p:spPr/>
         <p:txBody>
           <a:bodyPr>
             <a:noAutofit/>
@@ -28424,11 +30049,7 @@
           <a:p>
             <a:r>
               <a:rPr lang="en-IE" sz="3200" dirty="0"/>
-              <a:t>Scenario – exam results and </a:t>
-            </a:r>
-            <a:r>
-              <a:rPr lang="en-IE" sz="3200" b="1" dirty="0"/>
-              <a:t>average grade</a:t>
+              <a:t>Do we have to use all elements in the array?</a:t>
             </a:r>
           </a:p>
         </p:txBody>
@@ -28443,41 +30064,47 @@
             <p:ph idx="1"/>
           </p:nvPr>
         </p:nvSpPr>
-        <p:spPr>
-          <a:xfrm>
-            <a:off x="1981200" y="1856580"/>
-            <a:ext cx="4267200" cy="4925220"/>
-          </a:xfrm>
-        </p:spPr>
+        <p:spPr/>
         <p:txBody>
           <a:bodyPr>
-            <a:normAutofit lnSpcReduction="10000"/>
+            <a:normAutofit/>
           </a:bodyPr>
           <a:lstStyle/>
           <a:p>
             <a:r>
               <a:rPr lang="en-IE" dirty="0"/>
-              <a:t>We have a class of 15 students.</a:t>
+              <a:t>No.  </a:t>
+            </a:r>
+          </a:p>
+          <a:p>
+            <a:endParaRPr lang="en-IE" dirty="0"/>
+          </a:p>
+          <a:p>
+            <a:r>
+              <a:rPr lang="en-IE" dirty="0">
+                <a:solidFill>
+                  <a:srgbClr val="FF0000"/>
+                </a:solidFill>
+              </a:rPr>
+              <a:t>But</a:t>
+            </a:r>
+            <a:r>
+              <a:rPr lang="en-IE" dirty="0"/>
+              <a:t>…this might cause logic errors, </a:t>
             </a:r>
             <a:br>
               <a:rPr lang="en-IE" dirty="0"/>
             </a:br>
-            <a:endParaRPr lang="en-IE" dirty="0"/>
-          </a:p>
-          <a:p>
             <a:r>
               <a:rPr lang="en-IE" dirty="0"/>
-              <a:t>They have a test coming up.</a:t>
+              <a:t>if we don’t take this into consideration </a:t>
             </a:r>
             <a:br>
               <a:rPr lang="en-IE" dirty="0"/>
             </a:br>
-            <a:endParaRPr lang="en-IE" dirty="0"/>
-          </a:p>
-          <a:p>
             <a:r>
               <a:rPr lang="en-IE" dirty="0"/>
-              <a:t>We want to store the results in an array and then find the average result.</a:t>
+              <a:t>in our coding.</a:t>
             </a:r>
           </a:p>
           <a:p>
@@ -28486,64 +30113,18 @@
             </a:pPr>
             <a:endParaRPr lang="en-IE" dirty="0"/>
           </a:p>
+          <a:p>
+            <a:r>
+              <a:rPr lang="en-IE" dirty="0"/>
+              <a:t>Consider this scenario…</a:t>
+            </a:r>
+          </a:p>
         </p:txBody>
       </p:sp>
-      <p:pic>
-        <p:nvPicPr>
-          <p:cNvPr id="1026" name="Picture 2" descr="Related image">
-            <a:extLst>
-              <a:ext uri="{FF2B5EF4-FFF2-40B4-BE49-F238E27FC236}">
-                <a16:creationId xmlns:a16="http://schemas.microsoft.com/office/drawing/2014/main" id="{04D6137A-0BED-4046-ABC0-A5EEC31751B9}"/>
-              </a:ext>
-            </a:extLst>
-          </p:cNvPr>
-          <p:cNvPicPr>
-            <a:picLocks noChangeAspect="1" noChangeArrowheads="1"/>
-          </p:cNvPicPr>
-          <p:nvPr/>
-        </p:nvPicPr>
-        <p:blipFill>
-          <a:blip r:embed="rId2">
-            <a:extLst>
-              <a:ext uri="{28A0092B-C50C-407E-A947-70E740481C1C}">
-                <a14:useLocalDpi xmlns:a14="http://schemas.microsoft.com/office/drawing/2010/main" val="0"/>
-              </a:ext>
-            </a:extLst>
-          </a:blip>
-          <a:srcRect/>
-          <a:stretch>
-            <a:fillRect/>
-          </a:stretch>
-        </p:blipFill>
-        <p:spPr bwMode="auto">
-          <a:xfrm>
-            <a:off x="6355557" y="2209801"/>
-            <a:ext cx="3819525" cy="3819525"/>
-          </a:xfrm>
-          <a:prstGeom prst="rect">
-            <a:avLst/>
-          </a:prstGeom>
-          <a:noFill/>
-          <a:ln>
-            <a:solidFill>
-              <a:schemeClr val="tx1"/>
-            </a:solidFill>
-          </a:ln>
-          <a:extLst>
-            <a:ext uri="{909E8E84-426E-40DD-AFC4-6F175D3DCCD1}">
-              <a14:hiddenFill xmlns:a14="http://schemas.microsoft.com/office/drawing/2010/main">
-                <a:solidFill>
-                  <a:srgbClr val="FFFFFF"/>
-                </a:solidFill>
-              </a14:hiddenFill>
-            </a:ext>
-          </a:extLst>
-        </p:spPr>
-      </p:pic>
     </p:spTree>
     <p:extLst>
       <p:ext uri="{BB962C8B-B14F-4D97-AF65-F5344CB8AC3E}">
-        <p14:creationId xmlns:p14="http://schemas.microsoft.com/office/powerpoint/2010/main" val="224552329"/>
+        <p14:creationId xmlns:p14="http://schemas.microsoft.com/office/powerpoint/2010/main" val="3213866818"/>
       </p:ext>
     </p:extLst>
   </p:cSld>
@@ -29069,6 +30650,176 @@
 </file>
 
 <file path=ppt/slides/slide40.xml><?xml version="1.0" encoding="utf-8"?>
+<p:sld xmlns:a="http://schemas.openxmlformats.org/drawingml/2006/main" xmlns:r="http://schemas.openxmlformats.org/officeDocument/2006/relationships" xmlns:p="http://schemas.openxmlformats.org/presentationml/2006/main">
+  <p:cSld>
+    <p:spTree>
+      <p:nvGrpSpPr>
+        <p:cNvPr id="1" name=""/>
+        <p:cNvGrpSpPr/>
+        <p:nvPr/>
+      </p:nvGrpSpPr>
+      <p:grpSpPr>
+        <a:xfrm>
+          <a:off x="0" y="0"/>
+          <a:ext cx="0" cy="0"/>
+          <a:chOff x="0" y="0"/>
+          <a:chExt cx="0" cy="0"/>
+        </a:xfrm>
+      </p:grpSpPr>
+      <p:sp>
+        <p:nvSpPr>
+          <p:cNvPr id="4" name="Title 3"/>
+          <p:cNvSpPr>
+            <a:spLocks noGrp="1"/>
+          </p:cNvSpPr>
+          <p:nvPr>
+            <p:ph type="title"/>
+          </p:nvPr>
+        </p:nvSpPr>
+        <p:spPr>
+          <a:xfrm>
+            <a:off x="1981200" y="274638"/>
+            <a:ext cx="8229600" cy="1143000"/>
+          </a:xfrm>
+        </p:spPr>
+        <p:txBody>
+          <a:bodyPr>
+            <a:noAutofit/>
+          </a:bodyPr>
+          <a:lstStyle/>
+          <a:p>
+            <a:r>
+              <a:rPr lang="en-IE" sz="3200" dirty="0"/>
+              <a:t>Scenario – exam results and </a:t>
+            </a:r>
+            <a:r>
+              <a:rPr lang="en-IE" sz="3200" b="1" dirty="0"/>
+              <a:t>average grade</a:t>
+            </a:r>
+          </a:p>
+        </p:txBody>
+      </p:sp>
+      <p:sp>
+        <p:nvSpPr>
+          <p:cNvPr id="5" name="Content Placeholder 4"/>
+          <p:cNvSpPr>
+            <a:spLocks noGrp="1"/>
+          </p:cNvSpPr>
+          <p:nvPr>
+            <p:ph idx="1"/>
+          </p:nvPr>
+        </p:nvSpPr>
+        <p:spPr>
+          <a:xfrm>
+            <a:off x="1981200" y="1856580"/>
+            <a:ext cx="4267200" cy="4925220"/>
+          </a:xfrm>
+        </p:spPr>
+        <p:txBody>
+          <a:bodyPr>
+            <a:normAutofit lnSpcReduction="10000"/>
+          </a:bodyPr>
+          <a:lstStyle/>
+          <a:p>
+            <a:r>
+              <a:rPr lang="en-IE" dirty="0"/>
+              <a:t>We have a class of 15 students.</a:t>
+            </a:r>
+            <a:br>
+              <a:rPr lang="en-IE" dirty="0"/>
+            </a:br>
+            <a:endParaRPr lang="en-IE" dirty="0"/>
+          </a:p>
+          <a:p>
+            <a:r>
+              <a:rPr lang="en-IE" dirty="0"/>
+              <a:t>They have a test coming up.</a:t>
+            </a:r>
+            <a:br>
+              <a:rPr lang="en-IE" dirty="0"/>
+            </a:br>
+            <a:endParaRPr lang="en-IE" dirty="0"/>
+          </a:p>
+          <a:p>
+            <a:r>
+              <a:rPr lang="en-IE" dirty="0"/>
+              <a:t>We want to store the results in an array and then find the average result.</a:t>
+            </a:r>
+          </a:p>
+          <a:p>
+            <a:pPr marL="0" indent="0">
+              <a:buNone/>
+            </a:pPr>
+            <a:endParaRPr lang="en-IE" dirty="0"/>
+          </a:p>
+        </p:txBody>
+      </p:sp>
+      <p:pic>
+        <p:nvPicPr>
+          <p:cNvPr id="1026" name="Picture 2" descr="Related image">
+            <a:extLst>
+              <a:ext uri="{FF2B5EF4-FFF2-40B4-BE49-F238E27FC236}">
+                <a16:creationId xmlns:a16="http://schemas.microsoft.com/office/drawing/2014/main" id="{04D6137A-0BED-4046-ABC0-A5EEC31751B9}"/>
+              </a:ext>
+            </a:extLst>
+          </p:cNvPr>
+          <p:cNvPicPr>
+            <a:picLocks noChangeAspect="1" noChangeArrowheads="1"/>
+          </p:cNvPicPr>
+          <p:nvPr/>
+        </p:nvPicPr>
+        <p:blipFill>
+          <a:blip r:embed="rId2">
+            <a:extLst>
+              <a:ext uri="{28A0092B-C50C-407E-A947-70E740481C1C}">
+                <a14:useLocalDpi xmlns:a14="http://schemas.microsoft.com/office/drawing/2010/main" val="0"/>
+              </a:ext>
+            </a:extLst>
+          </a:blip>
+          <a:srcRect/>
+          <a:stretch>
+            <a:fillRect/>
+          </a:stretch>
+        </p:blipFill>
+        <p:spPr bwMode="auto">
+          <a:xfrm>
+            <a:off x="6355557" y="2209801"/>
+            <a:ext cx="3819525" cy="3819525"/>
+          </a:xfrm>
+          <a:prstGeom prst="rect">
+            <a:avLst/>
+          </a:prstGeom>
+          <a:noFill/>
+          <a:ln>
+            <a:solidFill>
+              <a:schemeClr val="tx1"/>
+            </a:solidFill>
+          </a:ln>
+          <a:extLst>
+            <a:ext uri="{909E8E84-426E-40DD-AFC4-6F175D3DCCD1}">
+              <a14:hiddenFill xmlns:a14="http://schemas.microsoft.com/office/drawing/2010/main">
+                <a:solidFill>
+                  <a:srgbClr val="FFFFFF"/>
+                </a:solidFill>
+              </a14:hiddenFill>
+            </a:ext>
+          </a:extLst>
+        </p:spPr>
+      </p:pic>
+    </p:spTree>
+    <p:extLst>
+      <p:ext uri="{BB962C8B-B14F-4D97-AF65-F5344CB8AC3E}">
+        <p14:creationId xmlns:p14="http://schemas.microsoft.com/office/powerpoint/2010/main" val="224552329"/>
+      </p:ext>
+    </p:extLst>
+  </p:cSld>
+  <p:clrMapOvr>
+    <a:masterClrMapping/>
+  </p:clrMapOvr>
+</p:sld>
+</file>
+
+<file path=ppt/slides/slide41.xml><?xml version="1.0" encoding="utf-8"?>
 <p:sld xmlns:a="http://schemas.openxmlformats.org/drawingml/2006/main" xmlns:r="http://schemas.openxmlformats.org/officeDocument/2006/relationships" xmlns:p="http://schemas.openxmlformats.org/presentationml/2006/main">
   <p:cSld>
     <p:spTree>
@@ -30421,7 +32172,7 @@
 </p:sld>
 </file>
 
-<file path=ppt/slides/slide41.xml><?xml version="1.0" encoding="utf-8"?>
+<file path=ppt/slides/slide42.xml><?xml version="1.0" encoding="utf-8"?>
 <p:sld xmlns:a="http://schemas.openxmlformats.org/drawingml/2006/main" xmlns:r="http://schemas.openxmlformats.org/officeDocument/2006/relationships" xmlns:p="http://schemas.openxmlformats.org/presentationml/2006/main">
   <p:cSld>
     <p:spTree>
@@ -30650,7 +32401,7 @@
 </p:sld>
 </file>
 
-<file path=ppt/slides/slide42.xml><?xml version="1.0" encoding="utf-8"?>
+<file path=ppt/slides/slide43.xml><?xml version="1.0" encoding="utf-8"?>
 <p:sld xmlns:a="http://schemas.openxmlformats.org/drawingml/2006/main" xmlns:r="http://schemas.openxmlformats.org/officeDocument/2006/relationships" xmlns:p="http://schemas.openxmlformats.org/presentationml/2006/main">
   <p:cSld>
     <p:spTree>
@@ -30967,7 +32718,7 @@
 </p:sld>
 </file>
 
-<file path=ppt/slides/slide43.xml><?xml version="1.0" encoding="utf-8"?>
+<file path=ppt/slides/slide44.xml><?xml version="1.0" encoding="utf-8"?>
 <p:sld xmlns:a="http://schemas.openxmlformats.org/drawingml/2006/main" xmlns:r="http://schemas.openxmlformats.org/officeDocument/2006/relationships" xmlns:p="http://schemas.openxmlformats.org/presentationml/2006/main">
   <p:cSld>
     <p:spTree>

--- a/topic06-arrays/unit-1/talk-1-intro-to-arrays/a-arrays.pptx
+++ b/topic06-arrays/unit-1/talk-1-intro-to-arrays/a-arrays.pptx
@@ -251,7 +251,7 @@
           <a:p>
             <a:fld id="{58C3D141-1E1C-433C-AD3A-CD56CBBB4F9F}" type="datetimeFigureOut">
               <a:rPr lang="en-IE" smtClean="0"/>
-              <a:t>18/10/2025</a:t>
+              <a:t>19/10/2025</a:t>
             </a:fld>
             <a:endParaRPr lang="en-IE"/>
           </a:p>
@@ -7147,7 +7147,7 @@
             <a:fld id="{1D8BD707-D9CF-40AE-B4C6-C98DA3205C09}" type="datetimeFigureOut">
               <a:rPr lang="en-US" smtClean="0"/>
               <a:pPr/>
-              <a:t>10/18/25</a:t>
+              <a:t>10/19/25</a:t>
             </a:fld>
             <a:endParaRPr lang="en-US"/>
           </a:p>
@@ -7319,7 +7319,7 @@
             <a:fld id="{1D8BD707-D9CF-40AE-B4C6-C98DA3205C09}" type="datetimeFigureOut">
               <a:rPr lang="en-US" smtClean="0"/>
               <a:pPr/>
-              <a:t>10/18/25</a:t>
+              <a:t>10/19/25</a:t>
             </a:fld>
             <a:endParaRPr lang="en-US"/>
           </a:p>
@@ -7501,7 +7501,7 @@
             <a:fld id="{1D8BD707-D9CF-40AE-B4C6-C98DA3205C09}" type="datetimeFigureOut">
               <a:rPr lang="en-US" smtClean="0"/>
               <a:pPr/>
-              <a:t>10/18/25</a:t>
+              <a:t>10/19/25</a:t>
             </a:fld>
             <a:endParaRPr lang="en-US"/>
           </a:p>
@@ -8140,7 +8140,7 @@
             <a:fld id="{1D8BD707-D9CF-40AE-B4C6-C98DA3205C09}" type="datetimeFigureOut">
               <a:rPr lang="en-US" smtClean="0"/>
               <a:pPr/>
-              <a:t>10/18/25</a:t>
+              <a:t>10/19/25</a:t>
             </a:fld>
             <a:endParaRPr lang="en-US"/>
           </a:p>
@@ -8558,7 +8558,7 @@
             <a:fld id="{1D8BD707-D9CF-40AE-B4C6-C98DA3205C09}" type="datetimeFigureOut">
               <a:rPr lang="en-US" smtClean="0"/>
               <a:pPr/>
-              <a:t>10/18/25</a:t>
+              <a:t>10/19/25</a:t>
             </a:fld>
             <a:endParaRPr lang="en-US"/>
           </a:p>
@@ -8859,7 +8859,7 @@
             <a:fld id="{1D8BD707-D9CF-40AE-B4C6-C98DA3205C09}" type="datetimeFigureOut">
               <a:rPr lang="en-US" smtClean="0"/>
               <a:pPr/>
-              <a:t>10/18/25</a:t>
+              <a:t>10/19/25</a:t>
             </a:fld>
             <a:endParaRPr lang="en-US"/>
           </a:p>
@@ -9448,7 +9448,7 @@
             <a:fld id="{1D8BD707-D9CF-40AE-B4C6-C98DA3205C09}" type="datetimeFigureOut">
               <a:rPr lang="en-US" smtClean="0"/>
               <a:pPr/>
-              <a:t>10/18/25</a:t>
+              <a:t>10/19/25</a:t>
             </a:fld>
             <a:endParaRPr lang="en-US"/>
           </a:p>
@@ -9696,7 +9696,7 @@
             <a:fld id="{1D8BD707-D9CF-40AE-B4C6-C98DA3205C09}" type="datetimeFigureOut">
               <a:rPr lang="en-US" smtClean="0"/>
               <a:pPr/>
-              <a:t>10/18/25</a:t>
+              <a:t>10/19/25</a:t>
             </a:fld>
             <a:endParaRPr lang="en-US"/>
           </a:p>
@@ -9951,7 +9951,7 @@
             <a:fld id="{1D8BD707-D9CF-40AE-B4C6-C98DA3205C09}" type="datetimeFigureOut">
               <a:rPr lang="en-US" smtClean="0"/>
               <a:pPr/>
-              <a:t>10/18/25</a:t>
+              <a:t>10/19/25</a:t>
             </a:fld>
             <a:endParaRPr lang="en-US"/>
           </a:p>
@@ -10230,7 +10230,7 @@
             <a:fld id="{1D8BD707-D9CF-40AE-B4C6-C98DA3205C09}" type="datetimeFigureOut">
               <a:rPr lang="en-US" smtClean="0"/>
               <a:pPr/>
-              <a:t>10/18/25</a:t>
+              <a:t>10/19/25</a:t>
             </a:fld>
             <a:endParaRPr lang="en-US"/>
           </a:p>
@@ -10489,7 +10489,7 @@
             <a:fld id="{1D8BD707-D9CF-40AE-B4C6-C98DA3205C09}" type="datetimeFigureOut">
               <a:rPr lang="en-US" smtClean="0"/>
               <a:pPr/>
-              <a:t>10/18/25</a:t>
+              <a:t>10/19/25</a:t>
             </a:fld>
             <a:endParaRPr lang="en-US"/>
           </a:p>
@@ -10709,7 +10709,7 @@
             <a:fld id="{1D8BD707-D9CF-40AE-B4C6-C98DA3205C09}" type="datetimeFigureOut">
               <a:rPr lang="en-US" smtClean="0"/>
               <a:pPr/>
-              <a:t>10/18/25</a:t>
+              <a:t>10/19/25</a:t>
             </a:fld>
             <a:endParaRPr lang="en-US"/>
           </a:p>
@@ -32759,9 +32759,15 @@
       </p:sp>
       <p:pic>
         <p:nvPicPr>
-          <p:cNvPr id="3074" name="Picture 2" descr="Image result for questions"/>
+          <p:cNvPr id="3" name="Picture 2" descr="A green question mark in a circle&#10;&#10;AI-generated content may be incorrect.">
+            <a:extLst>
+              <a:ext uri="{FF2B5EF4-FFF2-40B4-BE49-F238E27FC236}">
+                <a16:creationId xmlns:a16="http://schemas.microsoft.com/office/drawing/2014/main" id="{7208605A-4105-7835-1D2F-9A2483838AA1}"/>
+              </a:ext>
+            </a:extLst>
+          </p:cNvPr>
           <p:cNvPicPr>
-            <a:picLocks noChangeAspect="1" noChangeArrowheads="1"/>
+            <a:picLocks noChangeAspect="1"/>
           </p:cNvPicPr>
           <p:nvPr/>
         </p:nvPicPr>
@@ -32773,29 +32779,18 @@
               </a:ext>
             </a:extLst>
           </a:blip>
-          <a:srcRect/>
           <a:stretch>
             <a:fillRect/>
           </a:stretch>
         </p:blipFill>
-        <p:spPr bwMode="auto">
+        <p:spPr>
           <a:xfrm>
-            <a:off x="3810000" y="2057401"/>
-            <a:ext cx="4343400" cy="3509469"/>
+            <a:off x="2971800" y="1325562"/>
+            <a:ext cx="5257800" cy="5257800"/>
           </a:xfrm>
           <a:prstGeom prst="rect">
             <a:avLst/>
           </a:prstGeom>
-          <a:noFill/>
-          <a:extLst>
-            <a:ext uri="{909E8E84-426E-40DD-AFC4-6F175D3DCCD1}">
-              <a14:hiddenFill xmlns:a14="http://schemas.microsoft.com/office/drawing/2010/main">
-                <a:solidFill>
-                  <a:srgbClr val="FFFFFF"/>
-                </a:solidFill>
-              </a14:hiddenFill>
-            </a:ext>
-          </a:extLst>
         </p:spPr>
       </p:pic>
     </p:spTree>
